--- a/TechnicalDocs/MetaFeature_Orchestrator_Final_Executive_Deck.pptx
+++ b/TechnicalDocs/MetaFeature_Orchestrator_Final_Executive_Deck.pptx
@@ -140,7 +140,7 @@
 <file path=ppt/revisionInfo.xml><?xml version="1.0" encoding="utf-8"?>
 <p1510:revInfo xmlns:a="http://schemas.openxmlformats.org/drawingml/2006/main" xmlns:r="http://schemas.openxmlformats.org/officeDocument/2006/relationships" xmlns:p1510="http://schemas.microsoft.com/office/powerpoint/2015/10/main">
   <p1510:revLst>
-    <p1510:client id="{E2F4E294-C42C-48C2-B0AC-4CB92F511EB4}" v="80" dt="2026-01-27T18:16:19.642"/>
+    <p1510:client id="{78417A35-AC10-4DE5-8A50-1620ED161A1A}" v="35" dt="2026-02-24T16:02:37.363"/>
   </p1510:revLst>
 </p1510:revInfo>
 </file>
@@ -149,349 +149,89 @@
 <pc:chgInfo xmlns:a="http://schemas.openxmlformats.org/drawingml/2006/main" xmlns:r="http://schemas.openxmlformats.org/officeDocument/2006/relationships" xmlns:ac="http://schemas.microsoft.com/office/drawing/2013/main/command" xmlns:pc="http://schemas.microsoft.com/office/powerpoint/2013/main/command">
   <pc:docChgLst>
     <pc:chgData name="Jane huang" userId="a5d43ce04888ed0d" providerId="LiveId" clId="{00FA1A45-4AAD-46DF-B7B0-174E362B8709}"/>
-    <pc:docChg chg="custSel addSld delSld modSld sldOrd">
-      <pc:chgData name="Jane huang" userId="a5d43ce04888ed0d" providerId="LiveId" clId="{00FA1A45-4AAD-46DF-B7B0-174E362B8709}" dt="2026-01-27T18:15:55.404" v="461" actId="1076"/>
+    <pc:docChg chg="custSel modSld">
+      <pc:chgData name="Jane huang" userId="a5d43ce04888ed0d" providerId="LiveId" clId="{00FA1A45-4AAD-46DF-B7B0-174E362B8709}" dt="2026-02-24T16:05:45.372" v="718" actId="20577"/>
       <pc:docMkLst>
         <pc:docMk/>
       </pc:docMkLst>
-      <pc:sldChg chg="addSp delSp modSp mod">
-        <pc:chgData name="Jane huang" userId="a5d43ce04888ed0d" providerId="LiveId" clId="{00FA1A45-4AAD-46DF-B7B0-174E362B8709}" dt="2026-01-26T22:55:36.523" v="22" actId="207"/>
+      <pc:sldChg chg="modSp mod modNotesTx">
+        <pc:chgData name="Jane huang" userId="a5d43ce04888ed0d" providerId="LiveId" clId="{00FA1A45-4AAD-46DF-B7B0-174E362B8709}" dt="2026-02-24T16:00:32.497" v="448" actId="20577"/>
+        <pc:sldMkLst>
+          <pc:docMk/>
+          <pc:sldMk cId="0" sldId="257"/>
+        </pc:sldMkLst>
+        <pc:spChg chg="mod">
+          <ac:chgData name="Jane huang" userId="a5d43ce04888ed0d" providerId="LiveId" clId="{00FA1A45-4AAD-46DF-B7B0-174E362B8709}" dt="2026-02-24T15:30:56.557" v="41" actId="20577"/>
+          <ac:spMkLst>
+            <pc:docMk/>
+            <pc:sldMk cId="0" sldId="257"/>
+            <ac:spMk id="3" creationId="{00000000-0000-0000-0000-000000000000}"/>
+          </ac:spMkLst>
+        </pc:spChg>
+      </pc:sldChg>
+      <pc:sldChg chg="modNotesTx">
+        <pc:chgData name="Jane huang" userId="a5d43ce04888ed0d" providerId="LiveId" clId="{00FA1A45-4AAD-46DF-B7B0-174E362B8709}" dt="2026-02-24T15:36:53.140" v="144" actId="20577"/>
+        <pc:sldMkLst>
+          <pc:docMk/>
+          <pc:sldMk cId="0" sldId="260"/>
+        </pc:sldMkLst>
+      </pc:sldChg>
+      <pc:sldChg chg="modNotesTx">
+        <pc:chgData name="Jane huang" userId="a5d43ce04888ed0d" providerId="LiveId" clId="{00FA1A45-4AAD-46DF-B7B0-174E362B8709}" dt="2026-02-24T15:41:37.929" v="330" actId="20577"/>
         <pc:sldMkLst>
           <pc:docMk/>
           <pc:sldMk cId="0" sldId="263"/>
         </pc:sldMkLst>
-        <pc:spChg chg="del">
-          <ac:chgData name="Jane huang" userId="a5d43ce04888ed0d" providerId="LiveId" clId="{00FA1A45-4AAD-46DF-B7B0-174E362B8709}" dt="2026-01-26T22:54:40.612" v="11" actId="478"/>
-          <ac:spMkLst>
-            <pc:docMk/>
-            <pc:sldMk cId="0" sldId="263"/>
-            <ac:spMk id="11" creationId="{B0D1929F-45F1-5547-E14F-7864FAD0F6BA}"/>
-          </ac:spMkLst>
-        </pc:spChg>
-        <pc:spChg chg="del">
-          <ac:chgData name="Jane huang" userId="a5d43ce04888ed0d" providerId="LiveId" clId="{00FA1A45-4AAD-46DF-B7B0-174E362B8709}" dt="2026-01-26T22:54:39.323" v="10" actId="478"/>
-          <ac:spMkLst>
-            <pc:docMk/>
-            <pc:sldMk cId="0" sldId="263"/>
-            <ac:spMk id="13" creationId="{DA2C4205-65D6-C177-69AE-EAC91A891ABB}"/>
-          </ac:spMkLst>
-        </pc:spChg>
-        <pc:graphicFrameChg chg="add mod modGraphic">
-          <ac:chgData name="Jane huang" userId="a5d43ce04888ed0d" providerId="LiveId" clId="{00FA1A45-4AAD-46DF-B7B0-174E362B8709}" dt="2026-01-26T22:55:36.523" v="22" actId="207"/>
-          <ac:graphicFrameMkLst>
-            <pc:docMk/>
-            <pc:sldMk cId="0" sldId="263"/>
-            <ac:graphicFrameMk id="4" creationId="{93ABB4E2-DBA6-8C25-D09F-101EBC6EBAF0}"/>
-          </ac:graphicFrameMkLst>
-        </pc:graphicFrameChg>
-        <pc:picChg chg="del">
-          <ac:chgData name="Jane huang" userId="a5d43ce04888ed0d" providerId="LiveId" clId="{00FA1A45-4AAD-46DF-B7B0-174E362B8709}" dt="2026-01-26T22:54:37.453" v="9" actId="478"/>
-          <ac:picMkLst>
-            <pc:docMk/>
-            <pc:sldMk cId="0" sldId="263"/>
-            <ac:picMk id="5" creationId="{34096F84-B9D4-FBC8-D365-4F4A778C5D93}"/>
-          </ac:picMkLst>
-        </pc:picChg>
-        <pc:picChg chg="mod">
-          <ac:chgData name="Jane huang" userId="a5d43ce04888ed0d" providerId="LiveId" clId="{00FA1A45-4AAD-46DF-B7B0-174E362B8709}" dt="2026-01-26T22:55:00.011" v="16" actId="1076"/>
-          <ac:picMkLst>
-            <pc:docMk/>
-            <pc:sldMk cId="0" sldId="263"/>
-            <ac:picMk id="5128" creationId="{FC46025F-9576-8C56-85B3-668DF385D3D1}"/>
-          </ac:picMkLst>
-        </pc:picChg>
       </pc:sldChg>
-      <pc:sldChg chg="addSp delSp modSp mod">
-        <pc:chgData name="Jane huang" userId="a5d43ce04888ed0d" providerId="LiveId" clId="{00FA1A45-4AAD-46DF-B7B0-174E362B8709}" dt="2026-01-27T16:03:46.099" v="132" actId="14100"/>
+      <pc:sldChg chg="modNotesTx">
+        <pc:chgData name="Jane huang" userId="a5d43ce04888ed0d" providerId="LiveId" clId="{00FA1A45-4AAD-46DF-B7B0-174E362B8709}" dt="2026-02-24T16:03:58.484" v="506" actId="6549"/>
         <pc:sldMkLst>
           <pc:docMk/>
           <pc:sldMk cId="0" sldId="264"/>
         </pc:sldMkLst>
-        <pc:spChg chg="mod">
-          <ac:chgData name="Jane huang" userId="a5d43ce04888ed0d" providerId="LiveId" clId="{00FA1A45-4AAD-46DF-B7B0-174E362B8709}" dt="2026-01-27T16:03:46.099" v="132" actId="14100"/>
+      </pc:sldChg>
+      <pc:sldChg chg="addSp modNotesTx">
+        <pc:chgData name="Jane huang" userId="a5d43ce04888ed0d" providerId="LiveId" clId="{00FA1A45-4AAD-46DF-B7B0-174E362B8709}" dt="2026-02-24T15:44:35.196" v="446" actId="20577"/>
+        <pc:sldMkLst>
+          <pc:docMk/>
+          <pc:sldMk cId="0" sldId="268"/>
+        </pc:sldMkLst>
+        <pc:spChg chg="add">
+          <ac:chgData name="Jane huang" userId="a5d43ce04888ed0d" providerId="LiveId" clId="{00FA1A45-4AAD-46DF-B7B0-174E362B8709}" dt="2026-02-24T04:42:35.548" v="3"/>
           <ac:spMkLst>
             <pc:docMk/>
-            <pc:sldMk cId="0" sldId="264"/>
-            <ac:spMk id="2" creationId="{00000000-0000-0000-0000-000000000000}"/>
+            <pc:sldMk cId="0" sldId="268"/>
+            <ac:spMk id="4" creationId="{ECD17F52-4971-29AE-ABF2-84BF5F353D40}"/>
           </ac:spMkLst>
         </pc:spChg>
-        <pc:spChg chg="add mod">
-          <ac:chgData name="Jane huang" userId="a5d43ce04888ed0d" providerId="LiveId" clId="{00FA1A45-4AAD-46DF-B7B0-174E362B8709}" dt="2026-01-26T22:57:48.882" v="42" actId="207"/>
-          <ac:spMkLst>
-            <pc:docMk/>
-            <pc:sldMk cId="0" sldId="264"/>
-            <ac:spMk id="4" creationId="{00C90AA6-AC27-01E4-56F3-1EEA06FE4A15}"/>
-          </ac:spMkLst>
-        </pc:spChg>
-        <pc:spChg chg="add del mod">
-          <ac:chgData name="Jane huang" userId="a5d43ce04888ed0d" providerId="LiveId" clId="{00FA1A45-4AAD-46DF-B7B0-174E362B8709}" dt="2026-01-26T22:56:43.974" v="28" actId="478"/>
-          <ac:spMkLst>
-            <pc:docMk/>
-            <pc:sldMk cId="0" sldId="264"/>
-            <ac:spMk id="7" creationId="{50DBBD71-4A85-13B3-3023-6F49886F634F}"/>
-          </ac:spMkLst>
-        </pc:spChg>
-        <pc:spChg chg="add mod">
-          <ac:chgData name="Jane huang" userId="a5d43ce04888ed0d" providerId="LiveId" clId="{00FA1A45-4AAD-46DF-B7B0-174E362B8709}" dt="2026-01-26T22:59:59.261" v="87" actId="1076"/>
-          <ac:spMkLst>
-            <pc:docMk/>
-            <pc:sldMk cId="0" sldId="264"/>
-            <ac:spMk id="10" creationId="{12DA8330-425D-A477-7B9C-F10F946FDA9D}"/>
-          </ac:spMkLst>
-        </pc:spChg>
-        <pc:spChg chg="add mod">
-          <ac:chgData name="Jane huang" userId="a5d43ce04888ed0d" providerId="LiveId" clId="{00FA1A45-4AAD-46DF-B7B0-174E362B8709}" dt="2026-01-26T23:00:47.477" v="97" actId="255"/>
-          <ac:spMkLst>
-            <pc:docMk/>
-            <pc:sldMk cId="0" sldId="264"/>
-            <ac:spMk id="13" creationId="{567365C6-FE47-E51E-B6A9-8997BB3248E2}"/>
-          </ac:spMkLst>
-        </pc:spChg>
-        <pc:graphicFrameChg chg="mod">
-          <ac:chgData name="Jane huang" userId="a5d43ce04888ed0d" providerId="LiveId" clId="{00FA1A45-4AAD-46DF-B7B0-174E362B8709}" dt="2026-01-26T22:53:53.432" v="8" actId="1076"/>
-          <ac:graphicFrameMkLst>
-            <pc:docMk/>
-            <pc:sldMk cId="0" sldId="264"/>
-            <ac:graphicFrameMk id="5" creationId="{9575C9A9-D256-E7B4-DB10-087F03604B94}"/>
-          </ac:graphicFrameMkLst>
-        </pc:graphicFrameChg>
-        <pc:graphicFrameChg chg="add del mod">
-          <ac:chgData name="Jane huang" userId="a5d43ce04888ed0d" providerId="LiveId" clId="{00FA1A45-4AAD-46DF-B7B0-174E362B8709}" dt="2026-01-26T22:56:43.974" v="28" actId="478"/>
-          <ac:graphicFrameMkLst>
-            <pc:docMk/>
-            <pc:sldMk cId="0" sldId="264"/>
-            <ac:graphicFrameMk id="6" creationId="{0C3BE62C-FDAE-CD44-15D9-270BBE4B8D13}"/>
-          </ac:graphicFrameMkLst>
-        </pc:graphicFrameChg>
-        <pc:graphicFrameChg chg="add mod modGraphic">
-          <ac:chgData name="Jane huang" userId="a5d43ce04888ed0d" providerId="LiveId" clId="{00FA1A45-4AAD-46DF-B7B0-174E362B8709}" dt="2026-01-26T23:00:01.431" v="88" actId="1076"/>
-          <ac:graphicFrameMkLst>
-            <pc:docMk/>
-            <pc:sldMk cId="0" sldId="264"/>
-            <ac:graphicFrameMk id="8" creationId="{A246253C-0C83-E190-EA64-9A3B3DE04DBD}"/>
-          </ac:graphicFrameMkLst>
-        </pc:graphicFrameChg>
-        <pc:graphicFrameChg chg="add mod modGraphic">
-          <ac:chgData name="Jane huang" userId="a5d43ce04888ed0d" providerId="LiveId" clId="{00FA1A45-4AAD-46DF-B7B0-174E362B8709}" dt="2026-01-26T23:01:14.218" v="106" actId="1076"/>
-          <ac:graphicFrameMkLst>
-            <pc:docMk/>
-            <pc:sldMk cId="0" sldId="264"/>
-            <ac:graphicFrameMk id="11" creationId="{F2C84B82-8810-026F-B331-94D256199AEF}"/>
-          </ac:graphicFrameMkLst>
-        </pc:graphicFrameChg>
-        <pc:picChg chg="add mod">
-          <ac:chgData name="Jane huang" userId="a5d43ce04888ed0d" providerId="LiveId" clId="{00FA1A45-4AAD-46DF-B7B0-174E362B8709}" dt="2026-01-26T23:03:06.564" v="109" actId="1076"/>
-          <ac:picMkLst>
-            <pc:docMk/>
-            <pc:sldMk cId="0" sldId="264"/>
-            <ac:picMk id="2051" creationId="{D156EF94-6EDA-CBD4-1B4C-5A871329F064}"/>
-          </ac:picMkLst>
-        </pc:picChg>
-        <pc:picChg chg="add mod">
-          <ac:chgData name="Jane huang" userId="a5d43ce04888ed0d" providerId="LiveId" clId="{00FA1A45-4AAD-46DF-B7B0-174E362B8709}" dt="2026-01-26T23:03:44.663" v="113" actId="1076"/>
-          <ac:picMkLst>
-            <pc:docMk/>
-            <pc:sldMk cId="0" sldId="264"/>
-            <ac:picMk id="2053" creationId="{5F1255C6-B666-07EA-67DF-A2D27047F974}"/>
-          </ac:picMkLst>
-        </pc:picChg>
       </pc:sldChg>
-      <pc:sldChg chg="modSp del mod">
-        <pc:chgData name="Jane huang" userId="a5d43ce04888ed0d" providerId="LiveId" clId="{00FA1A45-4AAD-46DF-B7B0-174E362B8709}" dt="2026-01-27T18:03:49.813" v="414" actId="47"/>
+      <pc:sldChg chg="modNotesTx">
+        <pc:chgData name="Jane huang" userId="a5d43ce04888ed0d" providerId="LiveId" clId="{00FA1A45-4AAD-46DF-B7B0-174E362B8709}" dt="2026-02-24T15:29:53.890" v="21" actId="20577"/>
         <pc:sldMkLst>
           <pc:docMk/>
-          <pc:sldMk cId="0" sldId="266"/>
+          <pc:sldMk cId="0" sldId="269"/>
         </pc:sldMkLst>
-        <pc:graphicFrameChg chg="mod">
-          <ac:chgData name="Jane huang" userId="a5d43ce04888ed0d" providerId="LiveId" clId="{00FA1A45-4AAD-46DF-B7B0-174E362B8709}" dt="2026-01-26T23:07:15.486" v="114" actId="14100"/>
-          <ac:graphicFrameMkLst>
-            <pc:docMk/>
-            <pc:sldMk cId="0" sldId="266"/>
-            <ac:graphicFrameMk id="5" creationId="{266AB5E4-1A27-1806-E92C-AC34584BE76D}"/>
-          </ac:graphicFrameMkLst>
-        </pc:graphicFrameChg>
       </pc:sldChg>
-      <pc:sldChg chg="addSp delSp modSp add mod ord">
-        <pc:chgData name="Jane huang" userId="a5d43ce04888ed0d" providerId="LiveId" clId="{00FA1A45-4AAD-46DF-B7B0-174E362B8709}" dt="2026-01-27T18:13:02.913" v="460" actId="1076"/>
+      <pc:sldChg chg="modNotesTx">
+        <pc:chgData name="Jane huang" userId="a5d43ce04888ed0d" providerId="LiveId" clId="{00FA1A45-4AAD-46DF-B7B0-174E362B8709}" dt="2026-02-24T16:05:45.372" v="718" actId="20577"/>
+        <pc:sldMkLst>
+          <pc:docMk/>
+          <pc:sldMk cId="327196615" sldId="270"/>
+        </pc:sldMkLst>
+      </pc:sldChg>
+      <pc:sldChg chg="modNotesTx">
+        <pc:chgData name="Jane huang" userId="a5d43ce04888ed0d" providerId="LiveId" clId="{00FA1A45-4AAD-46DF-B7B0-174E362B8709}" dt="2026-02-24T16:00:58.266" v="449" actId="6549"/>
         <pc:sldMkLst>
           <pc:docMk/>
           <pc:sldMk cId="964164468" sldId="271"/>
         </pc:sldMkLst>
-        <pc:spChg chg="mod">
-          <ac:chgData name="Jane huang" userId="a5d43ce04888ed0d" providerId="LiveId" clId="{00FA1A45-4AAD-46DF-B7B0-174E362B8709}" dt="2026-01-27T17:58:09.368" v="283" actId="1076"/>
-          <ac:spMkLst>
-            <pc:docMk/>
-            <pc:sldMk cId="964164468" sldId="271"/>
-            <ac:spMk id="2" creationId="{09EC6704-DBB4-BF78-6CDB-529550DDE49C}"/>
-          </ac:spMkLst>
-        </pc:spChg>
-        <pc:spChg chg="del">
-          <ac:chgData name="Jane huang" userId="a5d43ce04888ed0d" providerId="LiveId" clId="{00FA1A45-4AAD-46DF-B7B0-174E362B8709}" dt="2026-01-27T16:04:09.527" v="141" actId="478"/>
-          <ac:spMkLst>
-            <pc:docMk/>
-            <pc:sldMk cId="964164468" sldId="271"/>
-            <ac:spMk id="4" creationId="{BB081B67-9389-E97E-6B06-03D20C0F977E}"/>
-          </ac:spMkLst>
-        </pc:spChg>
-        <pc:spChg chg="add mod">
-          <ac:chgData name="Jane huang" userId="a5d43ce04888ed0d" providerId="LiveId" clId="{00FA1A45-4AAD-46DF-B7B0-174E362B8709}" dt="2026-01-27T17:58:17.591" v="285" actId="108"/>
-          <ac:spMkLst>
-            <pc:docMk/>
-            <pc:sldMk cId="964164468" sldId="271"/>
-            <ac:spMk id="6" creationId="{98A3D5B4-AEA9-CBFE-024D-04B6441F14AD}"/>
-          </ac:spMkLst>
-        </pc:spChg>
-        <pc:spChg chg="add del mod">
-          <ac:chgData name="Jane huang" userId="a5d43ce04888ed0d" providerId="LiveId" clId="{00FA1A45-4AAD-46DF-B7B0-174E362B8709}" dt="2026-01-27T18:04:38.709" v="428" actId="478"/>
-          <ac:spMkLst>
-            <pc:docMk/>
-            <pc:sldMk cId="964164468" sldId="271"/>
-            <ac:spMk id="9" creationId="{D27B8E9E-DA87-AB9C-61F9-8D3840816952}"/>
-          </ac:spMkLst>
-        </pc:spChg>
-        <pc:spChg chg="del">
-          <ac:chgData name="Jane huang" userId="a5d43ce04888ed0d" providerId="LiveId" clId="{00FA1A45-4AAD-46DF-B7B0-174E362B8709}" dt="2026-01-27T16:04:08.076" v="140" actId="478"/>
-          <ac:spMkLst>
-            <pc:docMk/>
-            <pc:sldMk cId="964164468" sldId="271"/>
-            <ac:spMk id="10" creationId="{6666EBC4-CE17-AF16-FC10-53557C9D5541}"/>
-          </ac:spMkLst>
-        </pc:spChg>
-        <pc:spChg chg="add del mod">
-          <ac:chgData name="Jane huang" userId="a5d43ce04888ed0d" providerId="LiveId" clId="{00FA1A45-4AAD-46DF-B7B0-174E362B8709}" dt="2026-01-27T18:03:24.251" v="409"/>
-          <ac:spMkLst>
-            <pc:docMk/>
-            <pc:sldMk cId="964164468" sldId="271"/>
-            <ac:spMk id="12" creationId="{9922F912-09A0-C325-C376-2837F7C7A7AB}"/>
-          </ac:spMkLst>
-        </pc:spChg>
-        <pc:spChg chg="del">
-          <ac:chgData name="Jane huang" userId="a5d43ce04888ed0d" providerId="LiveId" clId="{00FA1A45-4AAD-46DF-B7B0-174E362B8709}" dt="2026-01-27T16:04:12.047" v="143" actId="478"/>
-          <ac:spMkLst>
-            <pc:docMk/>
-            <pc:sldMk cId="964164468" sldId="271"/>
-            <ac:spMk id="13" creationId="{7AB700EE-0555-AA41-8CD5-2B46700C94A9}"/>
-          </ac:spMkLst>
-        </pc:spChg>
-        <pc:graphicFrameChg chg="del">
-          <ac:chgData name="Jane huang" userId="a5d43ce04888ed0d" providerId="LiveId" clId="{00FA1A45-4AAD-46DF-B7B0-174E362B8709}" dt="2026-01-27T16:07:59.947" v="147" actId="478"/>
-          <ac:graphicFrameMkLst>
-            <pc:docMk/>
-            <pc:sldMk cId="964164468" sldId="271"/>
-            <ac:graphicFrameMk id="5" creationId="{59B33D49-54AB-DF33-12CE-6132CADB0903}"/>
-          </ac:graphicFrameMkLst>
-        </pc:graphicFrameChg>
-        <pc:graphicFrameChg chg="add mod modGraphic">
-          <ac:chgData name="Jane huang" userId="a5d43ce04888ed0d" providerId="LiveId" clId="{00FA1A45-4AAD-46DF-B7B0-174E362B8709}" dt="2026-01-27T18:13:02.913" v="460" actId="1076"/>
-          <ac:graphicFrameMkLst>
-            <pc:docMk/>
-            <pc:sldMk cId="964164468" sldId="271"/>
-            <ac:graphicFrameMk id="7" creationId="{5B436B94-757E-3C53-D730-EAB74527F33F}"/>
-          </ac:graphicFrameMkLst>
-        </pc:graphicFrameChg>
-        <pc:graphicFrameChg chg="del">
-          <ac:chgData name="Jane huang" userId="a5d43ce04888ed0d" providerId="LiveId" clId="{00FA1A45-4AAD-46DF-B7B0-174E362B8709}" dt="2026-01-27T16:04:10.745" v="142" actId="478"/>
-          <ac:graphicFrameMkLst>
-            <pc:docMk/>
-            <pc:sldMk cId="964164468" sldId="271"/>
-            <ac:graphicFrameMk id="8" creationId="{0389F244-137E-D3CD-716C-6BB96BD9561A}"/>
-          </ac:graphicFrameMkLst>
-        </pc:graphicFrameChg>
-        <pc:graphicFrameChg chg="del">
-          <ac:chgData name="Jane huang" userId="a5d43ce04888ed0d" providerId="LiveId" clId="{00FA1A45-4AAD-46DF-B7B0-174E362B8709}" dt="2026-01-27T16:04:13.429" v="144" actId="478"/>
-          <ac:graphicFrameMkLst>
-            <pc:docMk/>
-            <pc:sldMk cId="964164468" sldId="271"/>
-            <ac:graphicFrameMk id="11" creationId="{70F9F2FC-D6D3-072D-1C30-63BF71636A25}"/>
-          </ac:graphicFrameMkLst>
-        </pc:graphicFrameChg>
-        <pc:graphicFrameChg chg="add mod modGraphic">
-          <ac:chgData name="Jane huang" userId="a5d43ce04888ed0d" providerId="LiveId" clId="{00FA1A45-4AAD-46DF-B7B0-174E362B8709}" dt="2026-01-27T18:12:52.428" v="456"/>
-          <ac:graphicFrameMkLst>
-            <pc:docMk/>
-            <pc:sldMk cId="964164468" sldId="271"/>
-            <ac:graphicFrameMk id="14" creationId="{D81C63D8-4ABC-0DFD-5DAC-63FDB42F135E}"/>
-          </ac:graphicFrameMkLst>
-        </pc:graphicFrameChg>
-        <pc:picChg chg="add mod">
-          <ac:chgData name="Jane huang" userId="a5d43ce04888ed0d" providerId="LiveId" clId="{00FA1A45-4AAD-46DF-B7B0-174E362B8709}" dt="2026-01-27T18:09:28.036" v="440" actId="1076"/>
-          <ac:picMkLst>
-            <pc:docMk/>
-            <pc:sldMk cId="964164468" sldId="271"/>
-            <ac:picMk id="16" creationId="{ADD58447-CF7F-11DC-5AB5-EFDE7386BD9C}"/>
-          </ac:picMkLst>
-        </pc:picChg>
-        <pc:picChg chg="del">
-          <ac:chgData name="Jane huang" userId="a5d43ce04888ed0d" providerId="LiveId" clId="{00FA1A45-4AAD-46DF-B7B0-174E362B8709}" dt="2026-01-27T16:04:14.054" v="145" actId="478"/>
-          <ac:picMkLst>
-            <pc:docMk/>
-            <pc:sldMk cId="964164468" sldId="271"/>
-            <ac:picMk id="2051" creationId="{7E395F42-D514-F279-88A8-971AC6D02036}"/>
-          </ac:picMkLst>
-        </pc:picChg>
-        <pc:picChg chg="del">
-          <ac:chgData name="Jane huang" userId="a5d43ce04888ed0d" providerId="LiveId" clId="{00FA1A45-4AAD-46DF-B7B0-174E362B8709}" dt="2026-01-27T16:04:14.947" v="146" actId="478"/>
-          <ac:picMkLst>
-            <pc:docMk/>
-            <pc:sldMk cId="964164468" sldId="271"/>
-            <ac:picMk id="2053" creationId="{563A8827-8BA1-F8B6-A19C-24DCB39D4482}"/>
-          </ac:picMkLst>
-        </pc:picChg>
-        <pc:picChg chg="add mod">
-          <ac:chgData name="Jane huang" userId="a5d43ce04888ed0d" providerId="LiveId" clId="{00FA1A45-4AAD-46DF-B7B0-174E362B8709}" dt="2026-01-27T18:12:58.535" v="459" actId="1076"/>
-          <ac:picMkLst>
-            <pc:docMk/>
-            <pc:sldMk cId="964164468" sldId="271"/>
-            <ac:picMk id="4099" creationId="{056FFAEA-04B4-229F-76F9-02F24E02DA67}"/>
-          </ac:picMkLst>
-        </pc:picChg>
       </pc:sldChg>
-      <pc:sldChg chg="addSp delSp modSp new mod">
-        <pc:chgData name="Jane huang" userId="a5d43ce04888ed0d" providerId="LiveId" clId="{00FA1A45-4AAD-46DF-B7B0-174E362B8709}" dt="2026-01-27T18:15:55.404" v="461" actId="1076"/>
+      <pc:sldChg chg="modNotesTx">
+        <pc:chgData name="Jane huang" userId="a5d43ce04888ed0d" providerId="LiveId" clId="{00FA1A45-4AAD-46DF-B7B0-174E362B8709}" dt="2026-02-24T16:02:52.308" v="505" actId="20577"/>
         <pc:sldMkLst>
           <pc:docMk/>
           <pc:sldMk cId="3944104745" sldId="272"/>
         </pc:sldMkLst>
-        <pc:spChg chg="mod">
-          <ac:chgData name="Jane huang" userId="a5d43ce04888ed0d" providerId="LiveId" clId="{00FA1A45-4AAD-46DF-B7B0-174E362B8709}" dt="2026-01-27T17:42:25.168" v="234" actId="255"/>
-          <ac:spMkLst>
-            <pc:docMk/>
-            <pc:sldMk cId="3944104745" sldId="272"/>
-            <ac:spMk id="2" creationId="{FEE0CB9C-A64E-BF2F-4A64-53D385A0BA5A}"/>
-          </ac:spMkLst>
-        </pc:spChg>
-        <pc:spChg chg="del">
-          <ac:chgData name="Jane huang" userId="a5d43ce04888ed0d" providerId="LiveId" clId="{00FA1A45-4AAD-46DF-B7B0-174E362B8709}" dt="2026-01-27T17:40:07.378" v="150" actId="478"/>
-          <ac:spMkLst>
-            <pc:docMk/>
-            <pc:sldMk cId="3944104745" sldId="272"/>
-            <ac:spMk id="3" creationId="{CCE72B1D-3E39-8132-1020-F0B2F181EB9A}"/>
-          </ac:spMkLst>
-        </pc:spChg>
-        <pc:spChg chg="add mod">
-          <ac:chgData name="Jane huang" userId="a5d43ce04888ed0d" providerId="LiveId" clId="{00FA1A45-4AAD-46DF-B7B0-174E362B8709}" dt="2026-01-27T18:15:55.404" v="461" actId="1076"/>
-          <ac:spMkLst>
-            <pc:docMk/>
-            <pc:sldMk cId="3944104745" sldId="272"/>
-            <ac:spMk id="5" creationId="{DE328666-80D2-BE1A-166D-D2515698AFA6}"/>
-          </ac:spMkLst>
-        </pc:spChg>
-        <pc:spChg chg="add mod">
-          <ac:chgData name="Jane huang" userId="a5d43ce04888ed0d" providerId="LiveId" clId="{00FA1A45-4AAD-46DF-B7B0-174E362B8709}" dt="2026-01-27T17:48:32.300" v="271" actId="1076"/>
-          <ac:spMkLst>
-            <pc:docMk/>
-            <pc:sldMk cId="3944104745" sldId="272"/>
-            <ac:spMk id="6" creationId="{E533E546-61D7-9716-E661-7D9398787D67}"/>
-          </ac:spMkLst>
-        </pc:spChg>
-        <pc:graphicFrameChg chg="add mod modGraphic">
-          <ac:chgData name="Jane huang" userId="a5d43ce04888ed0d" providerId="LiveId" clId="{00FA1A45-4AAD-46DF-B7B0-174E362B8709}" dt="2026-01-27T17:45:28.095" v="253" actId="2165"/>
-          <ac:graphicFrameMkLst>
-            <pc:docMk/>
-            <pc:sldMk cId="3944104745" sldId="272"/>
-            <ac:graphicFrameMk id="4" creationId="{A8A8B17E-02CF-E75C-2F9A-B564028E970A}"/>
-          </ac:graphicFrameMkLst>
-        </pc:graphicFrameChg>
       </pc:sldChg>
     </pc:docChg>
   </pc:docChgLst>
@@ -4704,7 +4444,7 @@
   <dgm:whole/>
   <dgm:extLst>
     <a:ext uri="http://schemas.microsoft.com/office/drawing/2008/diagram">
-      <dsp:dataModelExt xmlns:dsp="http://schemas.microsoft.com/office/drawing/2008/diagram" relId="rId8" minVer="http://schemas.openxmlformats.org/drawingml/2006/diagram"/>
+      <dsp:dataModelExt xmlns:dsp="http://schemas.microsoft.com/office/drawing/2008/diagram" relId="rId9" minVer="http://schemas.openxmlformats.org/drawingml/2006/diagram"/>
     </a:ext>
   </dgm:extLst>
 </dgm:dataModel>
@@ -4945,7 +4685,7 @@
   <dgm:whole/>
   <dgm:extLst>
     <a:ext uri="http://schemas.microsoft.com/office/drawing/2008/diagram">
-      <dsp:dataModelExt xmlns:dsp="http://schemas.microsoft.com/office/drawing/2008/diagram" relId="rId6" minVer="http://schemas.openxmlformats.org/drawingml/2006/diagram"/>
+      <dsp:dataModelExt xmlns:dsp="http://schemas.microsoft.com/office/drawing/2008/diagram" relId="rId7" minVer="http://schemas.openxmlformats.org/drawingml/2006/diagram"/>
     </a:ext>
   </dgm:extLst>
 </dgm:dataModel>
@@ -5559,7 +5299,7 @@
   <dgm:whole/>
   <dgm:extLst>
     <a:ext uri="http://schemas.microsoft.com/office/drawing/2008/diagram">
-      <dsp:dataModelExt xmlns:dsp="http://schemas.microsoft.com/office/drawing/2008/diagram" relId="rId6" minVer="http://schemas.openxmlformats.org/drawingml/2006/diagram"/>
+      <dsp:dataModelExt xmlns:dsp="http://schemas.microsoft.com/office/drawing/2008/diagram" relId="rId7" minVer="http://schemas.openxmlformats.org/drawingml/2006/diagram"/>
     </a:ext>
   </dgm:extLst>
 </dgm:dataModel>
@@ -6251,7 +5991,7 @@
   <dgm:whole/>
   <dgm:extLst>
     <a:ext uri="http://schemas.microsoft.com/office/drawing/2008/diagram">
-      <dsp:dataModelExt xmlns:dsp="http://schemas.microsoft.com/office/drawing/2008/diagram" relId="rId6" minVer="http://schemas.openxmlformats.org/drawingml/2006/diagram"/>
+      <dsp:dataModelExt xmlns:dsp="http://schemas.microsoft.com/office/drawing/2008/diagram" relId="rId7" minVer="http://schemas.openxmlformats.org/drawingml/2006/diagram"/>
     </a:ext>
   </dgm:extLst>
 </dgm:dataModel>
@@ -15673,7 +15413,7 @@
           <a:p>
             <a:fld id="{2D6CE3E2-880A-4272-BDF4-0F4F5C05DEDD}" type="datetimeFigureOut">
               <a:rPr lang="en-US" smtClean="0"/>
-              <a:t>1/27/2026</a:t>
+              <a:t>2/24/2026</a:t>
             </a:fld>
             <a:endParaRPr lang="en-US"/>
           </a:p>
@@ -15985,53 +15725,1751 @@
           <a:lstStyle/>
           <a:p>
             <a:r>
+              <a:rPr lang="en-US" dirty="0"/>
+              <a:t>Today I want to talk about something many AI teams might underestimate — that is</a:t>
+            </a:r>
+            <a:br>
+              <a:rPr lang="en-US" dirty="0"/>
+            </a:br>
+            <a:r>
+              <a:rPr lang="en-US" dirty="0"/>
+              <a:t>how to scale evaluation.</a:t>
+            </a:r>
+          </a:p>
+          <a:p>
+            <a:r>
+              <a:rPr lang="en-US" dirty="0"/>
+              <a:t>Not just score models.</a:t>
+            </a:r>
+            <a:br>
+              <a:rPr lang="en-US" dirty="0"/>
+            </a:br>
+            <a:r>
+              <a:rPr lang="en-US" dirty="0"/>
+              <a:t>Not just run benchmarks.</a:t>
+            </a:r>
+          </a:p>
+          <a:p>
+            <a:r>
+              <a:rPr lang="en-US" dirty="0"/>
+              <a:t>But how to make evaluation scale across hundreds of features, languages, and evolving models.</a:t>
+            </a:r>
+          </a:p>
+          <a:p>
+            <a:endParaRPr lang="en-US" dirty="0"/>
+          </a:p>
+        </p:txBody>
+      </p:sp>
+      <p:sp>
+        <p:nvSpPr>
+          <p:cNvPr id="4" name="Slide Number Placeholder 3"/>
+          <p:cNvSpPr>
+            <a:spLocks noGrp="1"/>
+          </p:cNvSpPr>
+          <p:nvPr>
+            <p:ph type="sldNum" sz="quarter" idx="5"/>
+          </p:nvPr>
+        </p:nvSpPr>
+        <p:spPr/>
+        <p:txBody>
+          <a:bodyPr/>
+          <a:lstStyle/>
+          <a:p>
+            <a:fld id="{BCB5180B-A137-4E2C-858C-649AFC4735B1}" type="slidenum">
+              <a:rPr lang="en-US" smtClean="0"/>
+              <a:t>1</a:t>
+            </a:fld>
+            <a:endParaRPr lang="en-US"/>
+          </a:p>
+        </p:txBody>
+      </p:sp>
+    </p:spTree>
+    <p:extLst>
+      <p:ext uri="{BB962C8B-B14F-4D97-AF65-F5344CB8AC3E}">
+        <p14:creationId xmlns:p14="http://schemas.microsoft.com/office/powerpoint/2010/main" val="3311609984"/>
+      </p:ext>
+    </p:extLst>
+  </p:cSld>
+  <p:clrMapOvr>
+    <a:masterClrMapping/>
+  </p:clrMapOvr>
+</p:notes>
+</file>
+
+<file path=ppt/notesSlides/notesSlide10.xml><?xml version="1.0" encoding="utf-8"?>
+<p:notes xmlns:a="http://schemas.openxmlformats.org/drawingml/2006/main" xmlns:r="http://schemas.openxmlformats.org/officeDocument/2006/relationships" xmlns:p="http://schemas.openxmlformats.org/presentationml/2006/main">
+  <p:cSld>
+    <p:spTree>
+      <p:nvGrpSpPr>
+        <p:cNvPr id="1" name=""/>
+        <p:cNvGrpSpPr/>
+        <p:nvPr/>
+      </p:nvGrpSpPr>
+      <p:grpSpPr>
+        <a:xfrm>
+          <a:off x="0" y="0"/>
+          <a:ext cx="0" cy="0"/>
+          <a:chOff x="0" y="0"/>
+          <a:chExt cx="0" cy="0"/>
+        </a:xfrm>
+      </p:grpSpPr>
+      <p:sp>
+        <p:nvSpPr>
+          <p:cNvPr id="2" name="Slide Image Placeholder 1"/>
+          <p:cNvSpPr>
+            <a:spLocks noGrp="1" noRot="1" noChangeAspect="1"/>
+          </p:cNvSpPr>
+          <p:nvPr>
+            <p:ph type="sldImg"/>
+          </p:nvPr>
+        </p:nvSpPr>
+        <p:spPr/>
+      </p:sp>
+      <p:sp>
+        <p:nvSpPr>
+          <p:cNvPr id="3" name="Notes Placeholder 2"/>
+          <p:cNvSpPr>
+            <a:spLocks noGrp="1"/>
+          </p:cNvSpPr>
+          <p:nvPr>
+            <p:ph type="body" idx="1"/>
+          </p:nvPr>
+        </p:nvSpPr>
+        <p:spPr/>
+        <p:txBody>
+          <a:bodyPr/>
+          <a:lstStyle/>
+          <a:p>
+            <a:r>
+              <a:rPr lang="en-US" dirty="0"/>
+              <a:t>“This is where governance meets scalability.</a:t>
+            </a:r>
+          </a:p>
+          <a:p>
+            <a:r>
+              <a:rPr lang="en-US" dirty="0"/>
+              <a:t>Responsible AI exists at three structural layers:</a:t>
+            </a:r>
+          </a:p>
+          <a:p>
+            <a:r>
+              <a:rPr lang="en-US" dirty="0"/>
+              <a:t>Privacy protection</a:t>
+            </a:r>
+            <a:br>
+              <a:rPr lang="en-US" dirty="0"/>
+            </a:br>
+            <a:r>
+              <a:rPr lang="en-US" dirty="0"/>
+              <a:t>Bias &amp; safety enforcement</a:t>
+            </a:r>
+            <a:br>
+              <a:rPr lang="en-US" dirty="0"/>
+            </a:br>
+            <a:r>
+              <a:rPr lang="en-US" dirty="0"/>
+              <a:t>Hallucination detection</a:t>
+            </a:r>
+          </a:p>
+          <a:p>
+            <a:r>
+              <a:rPr lang="en-US" dirty="0"/>
+              <a:t>These are not advisory — they are embedded.</a:t>
+            </a:r>
+          </a:p>
+          <a:p>
+            <a:r>
+              <a:rPr lang="en-US" dirty="0"/>
+              <a:t>For example:</a:t>
+            </a:r>
+            <a:br>
+              <a:rPr lang="en-US" dirty="0"/>
+            </a:br>
+            <a:r>
+              <a:rPr lang="en-US" dirty="0"/>
+              <a:t>If a translation leaks PII → automatic fail.</a:t>
+            </a:r>
+            <a:br>
+              <a:rPr lang="en-US" dirty="0"/>
+            </a:br>
+            <a:r>
+              <a:rPr lang="en-US" dirty="0"/>
+              <a:t>If a summarization invents medical advice → automatic fail.</a:t>
+            </a:r>
+          </a:p>
+          <a:p>
+            <a:r>
+              <a:rPr lang="en-US" dirty="0"/>
+              <a:t>As the product expands to new markets,</a:t>
+            </a:r>
+            <a:br>
+              <a:rPr lang="en-US" dirty="0"/>
+            </a:br>
+            <a:r>
+              <a:rPr lang="en-US" dirty="0"/>
+              <a:t>locale-specific RAI requirements are injected automatically.</a:t>
+            </a:r>
+          </a:p>
+          <a:p>
+            <a:r>
+              <a:rPr lang="en-US" dirty="0"/>
+              <a:t>Trust scales with product growth.”</a:t>
+            </a:r>
+          </a:p>
+          <a:p>
+            <a:endParaRPr lang="en-US" dirty="0"/>
+          </a:p>
+        </p:txBody>
+      </p:sp>
+      <p:sp>
+        <p:nvSpPr>
+          <p:cNvPr id="4" name="Slide Number Placeholder 3"/>
+          <p:cNvSpPr>
+            <a:spLocks noGrp="1"/>
+          </p:cNvSpPr>
+          <p:nvPr>
+            <p:ph type="sldNum" sz="quarter" idx="5"/>
+          </p:nvPr>
+        </p:nvSpPr>
+        <p:spPr/>
+        <p:txBody>
+          <a:bodyPr/>
+          <a:lstStyle/>
+          <a:p>
+            <a:fld id="{BCB5180B-A137-4E2C-858C-649AFC4735B1}" type="slidenum">
+              <a:rPr lang="en-US" smtClean="0"/>
+              <a:t>10</a:t>
+            </a:fld>
+            <a:endParaRPr lang="en-US"/>
+          </a:p>
+        </p:txBody>
+      </p:sp>
+    </p:spTree>
+    <p:extLst>
+      <p:ext uri="{BB962C8B-B14F-4D97-AF65-F5344CB8AC3E}">
+        <p14:creationId xmlns:p14="http://schemas.microsoft.com/office/powerpoint/2010/main" val="1908882425"/>
+      </p:ext>
+    </p:extLst>
+  </p:cSld>
+  <p:clrMapOvr>
+    <a:masterClrMapping/>
+  </p:clrMapOvr>
+</p:notes>
+</file>
+
+<file path=ppt/notesSlides/notesSlide11.xml><?xml version="1.0" encoding="utf-8"?>
+<p:notes xmlns:a="http://schemas.openxmlformats.org/drawingml/2006/main" xmlns:r="http://schemas.openxmlformats.org/officeDocument/2006/relationships" xmlns:p="http://schemas.openxmlformats.org/presentationml/2006/main">
+  <p:cSld>
+    <p:spTree>
+      <p:nvGrpSpPr>
+        <p:cNvPr id="1" name=""/>
+        <p:cNvGrpSpPr/>
+        <p:nvPr/>
+      </p:nvGrpSpPr>
+      <p:grpSpPr>
+        <a:xfrm>
+          <a:off x="0" y="0"/>
+          <a:ext cx="0" cy="0"/>
+          <a:chOff x="0" y="0"/>
+          <a:chExt cx="0" cy="0"/>
+        </a:xfrm>
+      </p:grpSpPr>
+      <p:sp>
+        <p:nvSpPr>
+          <p:cNvPr id="2" name="Slide Image Placeholder 1"/>
+          <p:cNvSpPr>
+            <a:spLocks noGrp="1" noRot="1" noChangeAspect="1"/>
+          </p:cNvSpPr>
+          <p:nvPr>
+            <p:ph type="sldImg"/>
+          </p:nvPr>
+        </p:nvSpPr>
+        <p:spPr/>
+      </p:sp>
+      <p:sp>
+        <p:nvSpPr>
+          <p:cNvPr id="3" name="Notes Placeholder 2"/>
+          <p:cNvSpPr>
+            <a:spLocks noGrp="1"/>
+          </p:cNvSpPr>
+          <p:nvPr>
+            <p:ph type="body" idx="1"/>
+          </p:nvPr>
+        </p:nvSpPr>
+        <p:spPr/>
+        <p:txBody>
+          <a:bodyPr/>
+          <a:lstStyle/>
+          <a:p>
+            <a:r>
+              <a:rPr lang="en-US" dirty="0"/>
+              <a:t>I will demo the meta feature orchestrator web app that I build by myself in another video with tons of examples. </a:t>
+            </a:r>
+          </a:p>
+        </p:txBody>
+      </p:sp>
+      <p:sp>
+        <p:nvSpPr>
+          <p:cNvPr id="4" name="Slide Number Placeholder 3"/>
+          <p:cNvSpPr>
+            <a:spLocks noGrp="1"/>
+          </p:cNvSpPr>
+          <p:nvPr>
+            <p:ph type="sldNum" sz="quarter" idx="5"/>
+          </p:nvPr>
+        </p:nvSpPr>
+        <p:spPr/>
+        <p:txBody>
+          <a:bodyPr/>
+          <a:lstStyle/>
+          <a:p>
+            <a:fld id="{BCB5180B-A137-4E2C-858C-649AFC4735B1}" type="slidenum">
+              <a:rPr lang="en-US" smtClean="0"/>
+              <a:t>11</a:t>
+            </a:fld>
+            <a:endParaRPr lang="en-US"/>
+          </a:p>
+        </p:txBody>
+      </p:sp>
+    </p:spTree>
+    <p:extLst>
+      <p:ext uri="{BB962C8B-B14F-4D97-AF65-F5344CB8AC3E}">
+        <p14:creationId xmlns:p14="http://schemas.microsoft.com/office/powerpoint/2010/main" val="1306371917"/>
+      </p:ext>
+    </p:extLst>
+  </p:cSld>
+  <p:clrMapOvr>
+    <a:masterClrMapping/>
+  </p:clrMapOvr>
+</p:notes>
+</file>
+
+<file path=ppt/notesSlides/notesSlide12.xml><?xml version="1.0" encoding="utf-8"?>
+<p:notes xmlns:a="http://schemas.openxmlformats.org/drawingml/2006/main" xmlns:r="http://schemas.openxmlformats.org/officeDocument/2006/relationships" xmlns:p="http://schemas.openxmlformats.org/presentationml/2006/main">
+  <p:cSld>
+    <p:spTree>
+      <p:nvGrpSpPr>
+        <p:cNvPr id="1" name=""/>
+        <p:cNvGrpSpPr/>
+        <p:nvPr/>
+      </p:nvGrpSpPr>
+      <p:grpSpPr>
+        <a:xfrm>
+          <a:off x="0" y="0"/>
+          <a:ext cx="0" cy="0"/>
+          <a:chOff x="0" y="0"/>
+          <a:chExt cx="0" cy="0"/>
+        </a:xfrm>
+      </p:grpSpPr>
+      <p:sp>
+        <p:nvSpPr>
+          <p:cNvPr id="2" name="Slide Image Placeholder 1"/>
+          <p:cNvSpPr>
+            <a:spLocks noGrp="1" noRot="1" noChangeAspect="1"/>
+          </p:cNvSpPr>
+          <p:nvPr>
+            <p:ph type="sldImg"/>
+          </p:nvPr>
+        </p:nvSpPr>
+        <p:spPr/>
+      </p:sp>
+      <p:sp>
+        <p:nvSpPr>
+          <p:cNvPr id="3" name="Notes Placeholder 2"/>
+          <p:cNvSpPr>
+            <a:spLocks noGrp="1"/>
+          </p:cNvSpPr>
+          <p:nvPr>
+            <p:ph type="body" idx="1"/>
+          </p:nvPr>
+        </p:nvSpPr>
+        <p:spPr/>
+        <p:txBody>
+          <a:bodyPr/>
+          <a:lstStyle/>
+          <a:p>
+            <a:r>
+              <a:rPr lang="en-US" dirty="0"/>
+              <a:t>“Let me close with three points.</a:t>
+            </a:r>
+          </a:p>
+          <a:p>
+            <a:r>
+              <a:rPr lang="en-US" dirty="0"/>
+              <a:t>First:</a:t>
+            </a:r>
+            <a:br>
+              <a:rPr lang="en-US" dirty="0"/>
+            </a:br>
+            <a:r>
+              <a:rPr lang="en-US" dirty="0"/>
+              <a:t>Evaluation must scale horizontally across features and locales.</a:t>
+            </a:r>
+          </a:p>
+          <a:p>
+            <a:r>
+              <a:rPr lang="en-US" dirty="0"/>
+              <a:t>Second:</a:t>
+            </a:r>
+            <a:br>
+              <a:rPr lang="en-US" dirty="0"/>
+            </a:br>
+            <a:r>
+              <a:rPr lang="en-US" dirty="0"/>
+              <a:t>It must scale vertically across complexity — including agentic systems.</a:t>
+            </a:r>
+          </a:p>
+          <a:p>
+            <a:r>
+              <a:rPr lang="en-US" dirty="0"/>
+              <a:t>Third:</a:t>
+            </a:r>
+            <a:br>
+              <a:rPr lang="en-US" dirty="0"/>
+            </a:br>
+            <a:r>
+              <a:rPr lang="en-US" dirty="0"/>
+              <a:t>It must scale economically and operationally across teams.</a:t>
+            </a:r>
+          </a:p>
+          <a:p>
+            <a:r>
+              <a:rPr lang="en-US" dirty="0"/>
+              <a:t>MetaFeature-Orchestrator turns evaluation from a manual bottleneck into governed, scalable infrastructure.</a:t>
+            </a:r>
+          </a:p>
+          <a:p>
+            <a:r>
+              <a:rPr lang="en-US" dirty="0"/>
+              <a:t>Because as AI systems become more autonomous,</a:t>
+            </a:r>
+            <a:br>
+              <a:rPr lang="en-US" dirty="0"/>
+            </a:br>
+            <a:r>
+              <a:rPr lang="en-US" dirty="0"/>
+              <a:t>evaluation must become more architectural.”</a:t>
+            </a:r>
+          </a:p>
+          <a:p>
+            <a:r>
+              <a:rPr lang="en-US" dirty="0"/>
+              <a:t>Thanks </a:t>
+            </a:r>
+            <a:r>
+              <a:rPr lang="en-US"/>
+              <a:t>for watching </a:t>
+            </a:r>
+            <a:endParaRPr lang="en-US" dirty="0"/>
+          </a:p>
+        </p:txBody>
+      </p:sp>
+      <p:sp>
+        <p:nvSpPr>
+          <p:cNvPr id="4" name="Slide Number Placeholder 3"/>
+          <p:cNvSpPr>
+            <a:spLocks noGrp="1"/>
+          </p:cNvSpPr>
+          <p:nvPr>
+            <p:ph type="sldNum" sz="quarter" idx="5"/>
+          </p:nvPr>
+        </p:nvSpPr>
+        <p:spPr/>
+        <p:txBody>
+          <a:bodyPr/>
+          <a:lstStyle/>
+          <a:p>
+            <a:fld id="{BCB5180B-A137-4E2C-858C-649AFC4735B1}" type="slidenum">
+              <a:rPr lang="en-US" smtClean="0"/>
+              <a:t>12</a:t>
+            </a:fld>
+            <a:endParaRPr lang="en-US"/>
+          </a:p>
+        </p:txBody>
+      </p:sp>
+    </p:spTree>
+    <p:extLst>
+      <p:ext uri="{BB962C8B-B14F-4D97-AF65-F5344CB8AC3E}">
+        <p14:creationId xmlns:p14="http://schemas.microsoft.com/office/powerpoint/2010/main" val="845296288"/>
+      </p:ext>
+    </p:extLst>
+  </p:cSld>
+  <p:clrMapOvr>
+    <a:masterClrMapping/>
+  </p:clrMapOvr>
+</p:notes>
+</file>
+
+<file path=ppt/notesSlides/notesSlide2.xml><?xml version="1.0" encoding="utf-8"?>
+<p:notes xmlns:a="http://schemas.openxmlformats.org/drawingml/2006/main" xmlns:r="http://schemas.openxmlformats.org/officeDocument/2006/relationships" xmlns:p="http://schemas.openxmlformats.org/presentationml/2006/main">
+  <p:cSld>
+    <p:spTree>
+      <p:nvGrpSpPr>
+        <p:cNvPr id="1" name=""/>
+        <p:cNvGrpSpPr/>
+        <p:nvPr/>
+      </p:nvGrpSpPr>
+      <p:grpSpPr>
+        <a:xfrm>
+          <a:off x="0" y="0"/>
+          <a:ext cx="0" cy="0"/>
+          <a:chOff x="0" y="0"/>
+          <a:chExt cx="0" cy="0"/>
+        </a:xfrm>
+      </p:grpSpPr>
+      <p:sp>
+        <p:nvSpPr>
+          <p:cNvPr id="2" name="Slide Image Placeholder 1"/>
+          <p:cNvSpPr>
+            <a:spLocks noGrp="1" noRot="1" noChangeAspect="1"/>
+          </p:cNvSpPr>
+          <p:nvPr>
+            <p:ph type="sldImg"/>
+          </p:nvPr>
+        </p:nvSpPr>
+        <p:spPr/>
+      </p:sp>
+      <p:sp>
+        <p:nvSpPr>
+          <p:cNvPr id="3" name="Notes Placeholder 2"/>
+          <p:cNvSpPr>
+            <a:spLocks noGrp="1"/>
+          </p:cNvSpPr>
+          <p:nvPr>
+            <p:ph type="body" idx="1"/>
+          </p:nvPr>
+        </p:nvSpPr>
+        <p:spPr/>
+        <p:txBody>
+          <a:bodyPr/>
+          <a:lstStyle/>
+          <a:p>
+            <a:r>
+              <a:rPr lang="en-US" dirty="0"/>
+              <a:t>“Let me summarize the core idea. Scale and autonomy make manual evaluation impossible.</a:t>
+            </a:r>
+          </a:p>
+          <a:p>
+            <a:r>
+              <a:rPr lang="en-US" dirty="0"/>
+              <a:t>If every feature team:</a:t>
+            </a:r>
+          </a:p>
+          <a:p>
+            <a:r>
+              <a:rPr lang="en-US" dirty="0"/>
+              <a:t>Writes their own prompts</a:t>
+            </a:r>
+          </a:p>
+          <a:p>
+            <a:r>
+              <a:rPr lang="en-US" dirty="0"/>
+              <a:t>Chooses their own metrics</a:t>
+            </a:r>
+          </a:p>
+          <a:p>
+            <a:r>
+              <a:rPr lang="en-US" dirty="0"/>
+              <a:t>Applies Responsible AI checks slightly differently</a:t>
+            </a:r>
+          </a:p>
+          <a:p>
+            <a:r>
+              <a:rPr lang="en-US" dirty="0"/>
+              <a:t>You lose consistency.</a:t>
+            </a:r>
+            <a:br>
+              <a:rPr lang="en-US" dirty="0"/>
+            </a:br>
+            <a:r>
+              <a:rPr lang="en-US" dirty="0"/>
+              <a:t>You lose comparability.</a:t>
+            </a:r>
+            <a:br>
+              <a:rPr lang="en-US" dirty="0"/>
+            </a:br>
+            <a:r>
+              <a:rPr lang="en-US" dirty="0"/>
+              <a:t>You lose trust.</a:t>
+            </a:r>
+          </a:p>
+          <a:p>
+            <a:r>
+              <a:rPr lang="en-US" dirty="0"/>
+              <a:t>So I treat evaluation as governed platform infrastructure.</a:t>
+            </a:r>
+          </a:p>
+          <a:p>
+            <a:r>
+              <a:rPr lang="en-US" dirty="0"/>
+              <a:t>But governance alone isn’t enough.</a:t>
+            </a:r>
+          </a:p>
+          <a:p>
+            <a:r>
+              <a:rPr lang="en-US" dirty="0"/>
+              <a:t>The key is metadata-driven orchestration.</a:t>
+            </a:r>
+          </a:p>
+          <a:p>
+            <a:r>
+              <a:rPr lang="en-US" dirty="0"/>
+              <a:t>That’s what makes it scalable.</a:t>
+            </a:r>
+          </a:p>
+          <a:p>
+            <a:r>
+              <a:rPr lang="en-US" dirty="0"/>
+              <a:t>And Responsible AI isn’t a checklist — it’s structurally enforced inside the orchestration layer.”</a:t>
+            </a:r>
+          </a:p>
+          <a:p>
+            <a:endParaRPr lang="en-US" dirty="0"/>
+          </a:p>
+        </p:txBody>
+      </p:sp>
+      <p:sp>
+        <p:nvSpPr>
+          <p:cNvPr id="4" name="Slide Number Placeholder 3"/>
+          <p:cNvSpPr>
+            <a:spLocks noGrp="1"/>
+          </p:cNvSpPr>
+          <p:nvPr>
+            <p:ph type="sldNum" sz="quarter" idx="5"/>
+          </p:nvPr>
+        </p:nvSpPr>
+        <p:spPr/>
+        <p:txBody>
+          <a:bodyPr/>
+          <a:lstStyle/>
+          <a:p>
+            <a:fld id="{BCB5180B-A137-4E2C-858C-649AFC4735B1}" type="slidenum">
+              <a:rPr lang="en-US" smtClean="0"/>
+              <a:t>2</a:t>
+            </a:fld>
+            <a:endParaRPr lang="en-US"/>
+          </a:p>
+        </p:txBody>
+      </p:sp>
+    </p:spTree>
+    <p:extLst>
+      <p:ext uri="{BB962C8B-B14F-4D97-AF65-F5344CB8AC3E}">
+        <p14:creationId xmlns:p14="http://schemas.microsoft.com/office/powerpoint/2010/main" val="3559830652"/>
+      </p:ext>
+    </p:extLst>
+  </p:cSld>
+  <p:clrMapOvr>
+    <a:masterClrMapping/>
+  </p:clrMapOvr>
+</p:notes>
+</file>
+
+<file path=ppt/notesSlides/notesSlide3.xml><?xml version="1.0" encoding="utf-8"?>
+<p:notes xmlns:a="http://schemas.openxmlformats.org/drawingml/2006/main" xmlns:r="http://schemas.openxmlformats.org/officeDocument/2006/relationships" xmlns:p="http://schemas.openxmlformats.org/presentationml/2006/main">
+  <p:cSld>
+    <p:spTree>
+      <p:nvGrpSpPr>
+        <p:cNvPr id="1" name=""/>
+        <p:cNvGrpSpPr/>
+        <p:nvPr/>
+      </p:nvGrpSpPr>
+      <p:grpSpPr>
+        <a:xfrm>
+          <a:off x="0" y="0"/>
+          <a:ext cx="0" cy="0"/>
+          <a:chOff x="0" y="0"/>
+          <a:chExt cx="0" cy="0"/>
+        </a:xfrm>
+      </p:grpSpPr>
+      <p:sp>
+        <p:nvSpPr>
+          <p:cNvPr id="2" name="Slide Image Placeholder 1"/>
+          <p:cNvSpPr>
+            <a:spLocks noGrp="1" noRot="1" noChangeAspect="1"/>
+          </p:cNvSpPr>
+          <p:nvPr>
+            <p:ph type="sldImg"/>
+          </p:nvPr>
+        </p:nvSpPr>
+        <p:spPr/>
+      </p:sp>
+      <p:sp>
+        <p:nvSpPr>
+          <p:cNvPr id="3" name="Notes Placeholder 2"/>
+          <p:cNvSpPr>
+            <a:spLocks noGrp="1"/>
+          </p:cNvSpPr>
+          <p:nvPr>
+            <p:ph type="body" idx="1"/>
+          </p:nvPr>
+        </p:nvSpPr>
+        <p:spPr/>
+        <p:txBody>
+          <a:bodyPr/>
+          <a:lstStyle/>
+          <a:p>
+            <a:r>
+              <a:rPr lang="en-US" dirty="0"/>
+              <a:t>“At large scale, evaluation fails in four ways:</a:t>
+            </a:r>
+          </a:p>
+          <a:p>
+            <a:r>
+              <a:rPr lang="en-US" dirty="0"/>
+              <a:t>Feature-specific evaluation doesn’t generalize.</a:t>
+            </a:r>
+          </a:p>
+          <a:p>
+            <a:r>
+              <a:rPr lang="en-US" dirty="0"/>
+              <a:t>LLM-as-judge increases throughput but introduces drift.</a:t>
+            </a:r>
+          </a:p>
+          <a:p>
+            <a:r>
+              <a:rPr lang="en-US" dirty="0"/>
+              <a:t>Prompts evolve informally over time.</a:t>
+            </a:r>
+          </a:p>
+          <a:p>
+            <a:r>
+              <a:rPr lang="en-US" dirty="0"/>
+              <a:t>Risk enforcement becomes inconsistent across teams.</a:t>
+            </a:r>
+          </a:p>
+          <a:p>
+            <a:r>
+              <a:rPr lang="en-US" dirty="0"/>
+              <a:t>The deeper issue is this:</a:t>
+            </a:r>
+          </a:p>
+          <a:p>
+            <a:r>
+              <a:rPr lang="en-US" dirty="0"/>
+              <a:t>Evaluation today is treated as content —</a:t>
+            </a:r>
+            <a:br>
+              <a:rPr lang="en-US" dirty="0"/>
+            </a:br>
+            <a:r>
+              <a:rPr lang="en-US" dirty="0"/>
+              <a:t>but it should be treated as code.</a:t>
+            </a:r>
+          </a:p>
+          <a:p>
+            <a:r>
+              <a:rPr lang="en-US" dirty="0"/>
+              <a:t>Without a governed evaluation layer, you cannot:</a:t>
+            </a:r>
+          </a:p>
+          <a:p>
+            <a:r>
+              <a:rPr lang="en-US" dirty="0"/>
+              <a:t>Compare scores across time</a:t>
+            </a:r>
+          </a:p>
+          <a:p>
+            <a:r>
+              <a:rPr lang="en-US" dirty="0"/>
+              <a:t>Compare scores across features</a:t>
+            </a:r>
+          </a:p>
+          <a:p>
+            <a:r>
+              <a:rPr lang="en-US" dirty="0"/>
+              <a:t>Or ensure consistent RAI enforcement</a:t>
+            </a:r>
+          </a:p>
+          <a:p>
+            <a:r>
+              <a:rPr lang="en-US" dirty="0"/>
+              <a:t>The bottleneck is architectural, not human.”</a:t>
+            </a:r>
+          </a:p>
+          <a:p>
+            <a:endParaRPr lang="en-US" dirty="0"/>
+          </a:p>
+        </p:txBody>
+      </p:sp>
+      <p:sp>
+        <p:nvSpPr>
+          <p:cNvPr id="4" name="Slide Number Placeholder 3"/>
+          <p:cNvSpPr>
+            <a:spLocks noGrp="1"/>
+          </p:cNvSpPr>
+          <p:nvPr>
+            <p:ph type="sldNum" sz="quarter" idx="5"/>
+          </p:nvPr>
+        </p:nvSpPr>
+        <p:spPr/>
+        <p:txBody>
+          <a:bodyPr/>
+          <a:lstStyle/>
+          <a:p>
+            <a:fld id="{BCB5180B-A137-4E2C-858C-649AFC4735B1}" type="slidenum">
+              <a:rPr lang="en-US" smtClean="0"/>
+              <a:t>3</a:t>
+            </a:fld>
+            <a:endParaRPr lang="en-US"/>
+          </a:p>
+        </p:txBody>
+      </p:sp>
+    </p:spTree>
+    <p:extLst>
+      <p:ext uri="{BB962C8B-B14F-4D97-AF65-F5344CB8AC3E}">
+        <p14:creationId xmlns:p14="http://schemas.microsoft.com/office/powerpoint/2010/main" val="2936953672"/>
+      </p:ext>
+    </p:extLst>
+  </p:cSld>
+  <p:clrMapOvr>
+    <a:masterClrMapping/>
+  </p:clrMapOvr>
+</p:notes>
+</file>
+
+<file path=ppt/notesSlides/notesSlide4.xml><?xml version="1.0" encoding="utf-8"?>
+<p:notes xmlns:a="http://schemas.openxmlformats.org/drawingml/2006/main" xmlns:r="http://schemas.openxmlformats.org/officeDocument/2006/relationships" xmlns:p="http://schemas.openxmlformats.org/presentationml/2006/main">
+  <p:cSld>
+    <p:spTree>
+      <p:nvGrpSpPr>
+        <p:cNvPr id="1" name=""/>
+        <p:cNvGrpSpPr/>
+        <p:nvPr/>
+      </p:nvGrpSpPr>
+      <p:grpSpPr>
+        <a:xfrm>
+          <a:off x="0" y="0"/>
+          <a:ext cx="0" cy="0"/>
+          <a:chOff x="0" y="0"/>
+          <a:chExt cx="0" cy="0"/>
+        </a:xfrm>
+      </p:grpSpPr>
+      <p:sp>
+        <p:nvSpPr>
+          <p:cNvPr id="2" name="Slide Image Placeholder 1"/>
+          <p:cNvSpPr>
+            <a:spLocks noGrp="1" noRot="1" noChangeAspect="1"/>
+          </p:cNvSpPr>
+          <p:nvPr>
+            <p:ph type="sldImg"/>
+          </p:nvPr>
+        </p:nvSpPr>
+        <p:spPr/>
+      </p:sp>
+      <p:sp>
+        <p:nvSpPr>
+          <p:cNvPr id="3" name="Notes Placeholder 2"/>
+          <p:cNvSpPr>
+            <a:spLocks noGrp="1"/>
+          </p:cNvSpPr>
+          <p:nvPr>
+            <p:ph type="body" idx="1"/>
+          </p:nvPr>
+        </p:nvSpPr>
+        <p:spPr/>
+        <p:txBody>
+          <a:bodyPr/>
+          <a:lstStyle/>
+          <a:p>
+            <a:r>
+              <a:rPr lang="en-US" dirty="0"/>
+              <a:t>“Scalability starts with abstraction.</a:t>
+            </a:r>
+          </a:p>
+          <a:p>
+            <a:r>
+              <a:rPr lang="en-US" dirty="0"/>
+              <a:t>Quality is not universal.</a:t>
+            </a:r>
+          </a:p>
+          <a:p>
+            <a:r>
+              <a:rPr lang="en-US" dirty="0"/>
+              <a:t>A summarization model fails differently from a creative generator.</a:t>
+            </a:r>
+            <a:br>
+              <a:rPr lang="en-US" dirty="0"/>
+            </a:br>
+            <a:r>
+              <a:rPr lang="en-US" dirty="0"/>
+              <a:t>A translation feature fails differently from a personal assistant.</a:t>
+            </a:r>
+          </a:p>
+          <a:p>
+            <a:r>
+              <a:rPr lang="en-US" dirty="0"/>
+              <a:t>So instead of writing evaluation logic per feature,</a:t>
+            </a:r>
+            <a:br>
+              <a:rPr lang="en-US" dirty="0"/>
+            </a:br>
+            <a:r>
+              <a:rPr lang="en-US" dirty="0"/>
+              <a:t>I define canonical feature categories.</a:t>
+            </a:r>
+          </a:p>
+          <a:p>
+            <a:r>
+              <a:rPr lang="en-US" dirty="0"/>
+              <a:t>Each category defines:</a:t>
+            </a:r>
+          </a:p>
+          <a:p>
+            <a:r>
+              <a:rPr lang="en-US" dirty="0"/>
+              <a:t>What metrics are valid</a:t>
+            </a:r>
+          </a:p>
+          <a:p>
+            <a:r>
+              <a:rPr lang="en-US" dirty="0"/>
+              <a:t>What risks are dominant</a:t>
+            </a:r>
+          </a:p>
+          <a:p>
+            <a:r>
+              <a:rPr lang="en-US" dirty="0"/>
+              <a:t>What Responsible AI gates are required</a:t>
+            </a:r>
+          </a:p>
+          <a:p>
+            <a:r>
+              <a:rPr lang="en-US" dirty="0"/>
+              <a:t>For example:</a:t>
+            </a:r>
+          </a:p>
+          <a:p>
+            <a:r>
+              <a:rPr lang="en-US" dirty="0"/>
+              <a:t>Summarization , we focus Faithfulness, coverage  &amp; hallucination avoidance</a:t>
+            </a:r>
+            <a:br>
+              <a:rPr lang="en-US" dirty="0"/>
+            </a:br>
+            <a:r>
+              <a:rPr lang="en-US" dirty="0"/>
+              <a:t>Translation, we focus Semantic equivalence &amp; cultural alignment</a:t>
+            </a:r>
+            <a:br>
+              <a:rPr lang="en-US" dirty="0"/>
+            </a:br>
+            <a:r>
+              <a:rPr lang="en-US" dirty="0"/>
+              <a:t>This taxonomy becomes the foundation for reuse.</a:t>
+            </a:r>
+          </a:p>
+          <a:p>
+            <a:r>
+              <a:rPr lang="en-US" dirty="0"/>
+              <a:t>When a new feature launches, we don’t invent evaluation from scratch —</a:t>
+            </a:r>
+            <a:br>
+              <a:rPr lang="en-US" dirty="0"/>
+            </a:br>
+            <a:r>
+              <a:rPr lang="en-US" dirty="0"/>
+              <a:t>we map it to a category and inherit its evaluation contract.” Be noted that we also need to provide a</a:t>
+            </a:r>
+            <a:r>
+              <a:rPr lang="en-US" sz="1200" b="0" i="0" kern="1200" dirty="0">
+                <a:solidFill>
+                  <a:schemeClr val="tx1"/>
+                </a:solidFill>
+                <a:effectLst/>
+                <a:latin typeface="+mn-lt"/>
+                <a:ea typeface="+mn-ea"/>
+                <a:cs typeface="+mn-cs"/>
+              </a:rPr>
+              <a:t> controlled custom category for novel or emerging feature types. Features assigned to this category must explicitly declare their evaluation metrics and are subject to mandatory Responsible AI enforcement, ensuring that innovation does not bypass.</a:t>
+            </a:r>
+            <a:endParaRPr lang="en-US" dirty="0"/>
+          </a:p>
+          <a:p>
+            <a:endParaRPr lang="en-US" dirty="0"/>
+          </a:p>
+        </p:txBody>
+      </p:sp>
+      <p:sp>
+        <p:nvSpPr>
+          <p:cNvPr id="4" name="Slide Number Placeholder 3"/>
+          <p:cNvSpPr>
+            <a:spLocks noGrp="1"/>
+          </p:cNvSpPr>
+          <p:nvPr>
+            <p:ph type="sldNum" sz="quarter" idx="5"/>
+          </p:nvPr>
+        </p:nvSpPr>
+        <p:spPr/>
+        <p:txBody>
+          <a:bodyPr/>
+          <a:lstStyle/>
+          <a:p>
+            <a:fld id="{BCB5180B-A137-4E2C-858C-649AFC4735B1}" type="slidenum">
+              <a:rPr lang="en-US" smtClean="0"/>
+              <a:t>4</a:t>
+            </a:fld>
+            <a:endParaRPr lang="en-US"/>
+          </a:p>
+        </p:txBody>
+      </p:sp>
+    </p:spTree>
+    <p:extLst>
+      <p:ext uri="{BB962C8B-B14F-4D97-AF65-F5344CB8AC3E}">
+        <p14:creationId xmlns:p14="http://schemas.microsoft.com/office/powerpoint/2010/main" val="660389621"/>
+      </p:ext>
+    </p:extLst>
+  </p:cSld>
+  <p:clrMapOvr>
+    <a:masterClrMapping/>
+  </p:clrMapOvr>
+</p:notes>
+</file>
+
+<file path=ppt/notesSlides/notesSlide5.xml><?xml version="1.0" encoding="utf-8"?>
+<p:notes xmlns:a="http://schemas.openxmlformats.org/drawingml/2006/main" xmlns:r="http://schemas.openxmlformats.org/officeDocument/2006/relationships" xmlns:p="http://schemas.openxmlformats.org/presentationml/2006/main">
+  <p:cSld>
+    <p:spTree>
+      <p:nvGrpSpPr>
+        <p:cNvPr id="1" name=""/>
+        <p:cNvGrpSpPr/>
+        <p:nvPr/>
+      </p:nvGrpSpPr>
+      <p:grpSpPr>
+        <a:xfrm>
+          <a:off x="0" y="0"/>
+          <a:ext cx="0" cy="0"/>
+          <a:chOff x="0" y="0"/>
+          <a:chExt cx="0" cy="0"/>
+        </a:xfrm>
+      </p:grpSpPr>
+      <p:sp>
+        <p:nvSpPr>
+          <p:cNvPr id="2" name="Slide Image Placeholder 1"/>
+          <p:cNvSpPr>
+            <a:spLocks noGrp="1" noRot="1" noChangeAspect="1"/>
+          </p:cNvSpPr>
+          <p:nvPr>
+            <p:ph type="sldImg"/>
+          </p:nvPr>
+        </p:nvSpPr>
+        <p:spPr/>
+      </p:sp>
+      <p:sp>
+        <p:nvSpPr>
+          <p:cNvPr id="3" name="Notes Placeholder 2"/>
+          <p:cNvSpPr>
+            <a:spLocks noGrp="1"/>
+          </p:cNvSpPr>
+          <p:nvPr>
+            <p:ph type="body" idx="1"/>
+          </p:nvPr>
+        </p:nvSpPr>
+        <p:spPr/>
+        <p:txBody>
+          <a:bodyPr/>
+          <a:lstStyle/>
+          <a:p>
+            <a:r>
+              <a:rPr lang="en-US" dirty="0"/>
+              <a:t>“There are three principles that make this scalable in practice.</a:t>
+            </a:r>
+          </a:p>
+          <a:p>
+            <a:r>
+              <a:rPr lang="en-US" dirty="0"/>
+              <a:t>First: Auditability and traceability.</a:t>
+            </a:r>
+          </a:p>
+          <a:p>
+            <a:r>
+              <a:rPr lang="en-US" dirty="0"/>
+              <a:t>Every evaluation prompt is versioned.</a:t>
+            </a:r>
+            <a:br>
+              <a:rPr lang="en-US" dirty="0"/>
+            </a:br>
+            <a:r>
+              <a:rPr lang="en-US" dirty="0"/>
+              <a:t>Every metric is explicitly defined.</a:t>
+            </a:r>
+            <a:br>
+              <a:rPr lang="en-US" dirty="0"/>
+            </a:br>
+            <a:r>
+              <a:rPr lang="en-US" dirty="0"/>
+              <a:t>Every output is structured JSON.</a:t>
+            </a:r>
+          </a:p>
+          <a:p>
+            <a:r>
+              <a:rPr lang="en-US" dirty="0"/>
+              <a:t>This makes evaluation reproducible.</a:t>
+            </a:r>
+          </a:p>
+          <a:p>
+            <a:r>
+              <a:rPr lang="en-US" dirty="0"/>
+              <a:t>Second: Structural Responsible AI enforcement.</a:t>
+            </a:r>
+          </a:p>
+          <a:p>
+            <a:r>
+              <a:rPr lang="en-US" dirty="0"/>
+              <a:t>Safety, privacy, and bias are not optional scoring dimensions.</a:t>
+            </a:r>
+            <a:br>
+              <a:rPr lang="en-US" dirty="0"/>
+            </a:br>
+            <a:r>
+              <a:rPr lang="en-US" dirty="0"/>
+              <a:t>They are hard gates embedded in the template.</a:t>
+            </a:r>
+          </a:p>
+          <a:p>
+            <a:r>
+              <a:rPr lang="en-US" dirty="0"/>
+              <a:t>Third: Cost-aware orchestration.</a:t>
+            </a:r>
+          </a:p>
+          <a:p>
+            <a:r>
+              <a:rPr lang="en-US" dirty="0"/>
+              <a:t>Scalability is not just technical — it’s economic.</a:t>
+            </a:r>
+          </a:p>
+          <a:p>
+            <a:r>
+              <a:rPr lang="en-US" dirty="0"/>
+              <a:t>If every evaluation requires multi-step agent reasoning,</a:t>
+            </a:r>
+            <a:br>
+              <a:rPr lang="en-US" dirty="0"/>
+            </a:br>
+            <a:r>
+              <a:rPr lang="en-US" dirty="0"/>
+              <a:t>cost becomes the bottleneck.</a:t>
+            </a:r>
+          </a:p>
+          <a:p>
+            <a:r>
+              <a:rPr lang="en-US" dirty="0"/>
+              <a:t>So we separate deterministic and agentic modes.”</a:t>
+            </a:r>
+          </a:p>
+          <a:p>
+            <a:endParaRPr lang="en-US" dirty="0"/>
+          </a:p>
+        </p:txBody>
+      </p:sp>
+      <p:sp>
+        <p:nvSpPr>
+          <p:cNvPr id="4" name="Slide Number Placeholder 3"/>
+          <p:cNvSpPr>
+            <a:spLocks noGrp="1"/>
+          </p:cNvSpPr>
+          <p:nvPr>
+            <p:ph type="sldNum" sz="quarter" idx="5"/>
+          </p:nvPr>
+        </p:nvSpPr>
+        <p:spPr/>
+        <p:txBody>
+          <a:bodyPr/>
+          <a:lstStyle/>
+          <a:p>
+            <a:fld id="{BCB5180B-A137-4E2C-858C-649AFC4735B1}" type="slidenum">
+              <a:rPr lang="en-US" smtClean="0"/>
+              <a:t>5</a:t>
+            </a:fld>
+            <a:endParaRPr lang="en-US"/>
+          </a:p>
+        </p:txBody>
+      </p:sp>
+    </p:spTree>
+    <p:extLst>
+      <p:ext uri="{BB962C8B-B14F-4D97-AF65-F5344CB8AC3E}">
+        <p14:creationId xmlns:p14="http://schemas.microsoft.com/office/powerpoint/2010/main" val="2979698519"/>
+      </p:ext>
+    </p:extLst>
+  </p:cSld>
+  <p:clrMapOvr>
+    <a:masterClrMapping/>
+  </p:clrMapOvr>
+</p:notes>
+</file>
+
+<file path=ppt/notesSlides/notesSlide6.xml><?xml version="1.0" encoding="utf-8"?>
+<p:notes xmlns:a="http://schemas.openxmlformats.org/drawingml/2006/main" xmlns:r="http://schemas.openxmlformats.org/officeDocument/2006/relationships" xmlns:p="http://schemas.openxmlformats.org/presentationml/2006/main">
+  <p:cSld>
+    <p:spTree>
+      <p:nvGrpSpPr>
+        <p:cNvPr id="1" name=""/>
+        <p:cNvGrpSpPr/>
+        <p:nvPr/>
+      </p:nvGrpSpPr>
+      <p:grpSpPr>
+        <a:xfrm>
+          <a:off x="0" y="0"/>
+          <a:ext cx="0" cy="0"/>
+          <a:chOff x="0" y="0"/>
+          <a:chExt cx="0" cy="0"/>
+        </a:xfrm>
+      </p:grpSpPr>
+      <p:sp>
+        <p:nvSpPr>
+          <p:cNvPr id="2" name="Slide Image Placeholder 1"/>
+          <p:cNvSpPr>
+            <a:spLocks noGrp="1" noRot="1" noChangeAspect="1"/>
+          </p:cNvSpPr>
+          <p:nvPr>
+            <p:ph type="sldImg"/>
+          </p:nvPr>
+        </p:nvSpPr>
+        <p:spPr/>
+      </p:sp>
+      <p:sp>
+        <p:nvSpPr>
+          <p:cNvPr id="3" name="Notes Placeholder 2"/>
+          <p:cNvSpPr>
+            <a:spLocks noGrp="1"/>
+          </p:cNvSpPr>
+          <p:nvPr>
+            <p:ph type="body" idx="1"/>
+          </p:nvPr>
+        </p:nvSpPr>
+        <p:spPr/>
+        <p:txBody>
+          <a:bodyPr/>
+          <a:lstStyle/>
+          <a:p>
+            <a:r>
               <a:rPr lang="en-US" b="1" dirty="0"/>
-              <a:t>Goal-directed autonomy:</a:t>
+              <a:t>This is the core architectural decision.</a:t>
+            </a:r>
+          </a:p>
+          <a:p>
+            <a:r>
+              <a:rPr lang="en-US" dirty="0"/>
+              <a:t>We intentionally built </a:t>
+            </a:r>
+            <a:r>
+              <a:rPr lang="en-US" b="1" dirty="0"/>
+              <a:t>two modes</a:t>
             </a:r>
             <a:r>
               <a:rPr lang="en-US" dirty="0"/>
-              <a:t> An AI agent is designed to pursue a goal over multiple steps, not just respond to a single prompt.</a:t>
+              <a:t>.</a:t>
             </a:r>
           </a:p>
           <a:p>
             <a:r>
               <a:rPr lang="en-US" b="1" dirty="0"/>
-              <a:t>Reasoning + action loop:</a:t>
+              <a:t>Template Mode</a:t>
             </a:r>
             <a:r>
               <a:rPr lang="en-US" dirty="0"/>
-              <a:t> It observes outcomes, reasons about what happened, and decides what action to take next.</a:t>
+              <a:t> is pure Python.</a:t>
+            </a:r>
+            <a:br>
+              <a:rPr lang="en-US" dirty="0"/>
+            </a:br>
+            <a:r>
+              <a:rPr lang="en-US" dirty="0"/>
+              <a:t>It’s deterministic.</a:t>
+            </a:r>
+            <a:br>
+              <a:rPr lang="en-US" dirty="0"/>
+            </a:br>
+            <a:r>
+              <a:rPr lang="en-US" dirty="0"/>
+              <a:t>No dynamic reasoning.</a:t>
+            </a:r>
+            <a:br>
+              <a:rPr lang="en-US" dirty="0"/>
+            </a:br>
+            <a:r>
+              <a:rPr lang="en-US" dirty="0"/>
+              <a:t>It’s fast, predictable, and essentially free to run at scale.</a:t>
             </a:r>
           </a:p>
           <a:p>
             <a:r>
               <a:rPr lang="en-US" b="1" dirty="0"/>
-              <a:t>Tool use, not just text generation:</a:t>
+              <a:t>Agent Mode</a:t>
             </a:r>
             <a:r>
               <a:rPr lang="en-US" dirty="0"/>
-              <a:t> Agents can call tools (APIs, search, code, prompts, databases) to affect the world or gather information.</a:t>
+              <a:t> is built on the Microsoft Agent Framework.</a:t>
+            </a:r>
+            <a:br>
+              <a:rPr lang="en-US" dirty="0"/>
+            </a:br>
+            <a:r>
+              <a:rPr lang="en-US" dirty="0"/>
+              <a:t>It can use tools.</a:t>
+            </a:r>
+            <a:br>
+              <a:rPr lang="en-US" dirty="0"/>
+            </a:br>
+            <a:r>
+              <a:rPr lang="en-US" dirty="0"/>
+              <a:t>It has memory.</a:t>
+            </a:r>
+            <a:br>
+              <a:rPr lang="en-US" dirty="0"/>
+            </a:br>
+            <a:r>
+              <a:rPr lang="en-US" dirty="0"/>
+              <a:t>It makes dynamic decisions.</a:t>
             </a:r>
           </a:p>
           <a:p>
             <a:r>
-              <a:rPr lang="en-US" b="1" dirty="0"/>
-              <a:t>State and memory:</a:t>
-            </a:r>
-            <a:r>
               <a:rPr lang="en-US" dirty="0"/>
-              <a:t> Agents maintain task-relevant state across steps, enabling planning, correction, and adaptation.</a:t>
+              <a:t>So why do we need both?</a:t>
             </a:r>
           </a:p>
           <a:p>
             <a:r>
-              <a:rPr lang="en-US" b="1" dirty="0"/>
-              <a:t>Feedback-driven improvement:</a:t>
+              <a:rPr lang="en-US" dirty="0"/>
+              <a:t>Because scalability has two dimensions.</a:t>
             </a:r>
+          </a:p>
+          <a:p>
             <a:r>
               <a:rPr lang="en-US" dirty="0"/>
-              <a:t> Agents adjust behavior based on feedback rather than producing one-shot outputs.</a:t>
+              <a:t>Operational scale — handling massive volume — that’s Template Mode.</a:t>
             </a:r>
+            <a:br>
+              <a:rPr lang="en-US" dirty="0"/>
+            </a:br>
+            <a:r>
+              <a:rPr lang="en-US" dirty="0"/>
+              <a:t>Complexity scale — handling novel, ambiguous tasks — that’s Agent Mode.</a:t>
+            </a:r>
+          </a:p>
+          <a:p>
+            <a:r>
+              <a:rPr lang="en-US" dirty="0"/>
+              <a:t>Template Mode handles volume.</a:t>
+            </a:r>
+            <a:br>
+              <a:rPr lang="en-US" dirty="0"/>
+            </a:br>
+            <a:r>
+              <a:rPr lang="en-US" dirty="0"/>
+              <a:t>Agent Mode handles novelty.</a:t>
+            </a:r>
+          </a:p>
+          <a:p>
+            <a:r>
+              <a:rPr lang="en-US" dirty="0"/>
+              <a:t>Determinism protects the system.</a:t>
+            </a:r>
+            <a:br>
+              <a:rPr lang="en-US" dirty="0"/>
+            </a:br>
+            <a:r>
+              <a:rPr lang="en-US" dirty="0"/>
+              <a:t>Agent autonomy improves the system.</a:t>
+            </a:r>
+          </a:p>
+          <a:p>
+            <a:r>
+              <a:rPr lang="en-US" dirty="0"/>
+              <a:t>And any real production system evolves over time.</a:t>
+            </a:r>
+            <a:br>
+              <a:rPr lang="en-US" dirty="0"/>
+            </a:br>
+            <a:r>
+              <a:rPr lang="en-US" dirty="0"/>
+              <a:t>We start with these two modes, monitor performance and feedback, and let data guide how each one expands or replace.</a:t>
+            </a:r>
+          </a:p>
+          <a:p>
+            <a:r>
+              <a:rPr lang="en-US" dirty="0"/>
+              <a:t>Stability is the foundation.</a:t>
+            </a:r>
+            <a:br>
+              <a:rPr lang="en-US" dirty="0"/>
+            </a:br>
+            <a:r>
+              <a:rPr lang="en-US" dirty="0"/>
+              <a:t>Intelligence is the accelerator.</a:t>
+            </a:r>
+          </a:p>
+          <a:p>
+            <a:endParaRPr lang="en-US" dirty="0"/>
+          </a:p>
+        </p:txBody>
+      </p:sp>
+      <p:sp>
+        <p:nvSpPr>
+          <p:cNvPr id="4" name="Slide Number Placeholder 3"/>
+          <p:cNvSpPr>
+            <a:spLocks noGrp="1"/>
+          </p:cNvSpPr>
+          <p:nvPr>
+            <p:ph type="sldNum" sz="quarter" idx="5"/>
+          </p:nvPr>
+        </p:nvSpPr>
+        <p:spPr/>
+        <p:txBody>
+          <a:bodyPr/>
+          <a:lstStyle/>
+          <a:p>
+            <a:fld id="{BCB5180B-A137-4E2C-858C-649AFC4735B1}" type="slidenum">
+              <a:rPr lang="en-US" smtClean="0"/>
+              <a:t>6</a:t>
+            </a:fld>
+            <a:endParaRPr lang="en-US"/>
+          </a:p>
+        </p:txBody>
+      </p:sp>
+    </p:spTree>
+    <p:extLst>
+      <p:ext uri="{BB962C8B-B14F-4D97-AF65-F5344CB8AC3E}">
+        <p14:creationId xmlns:p14="http://schemas.microsoft.com/office/powerpoint/2010/main" val="576551909"/>
+      </p:ext>
+    </p:extLst>
+  </p:cSld>
+  <p:clrMapOvr>
+    <a:masterClrMapping/>
+  </p:clrMapOvr>
+</p:notes>
+</file>
+
+<file path=ppt/notesSlides/notesSlide7.xml><?xml version="1.0" encoding="utf-8"?>
+<p:notes xmlns:a="http://schemas.openxmlformats.org/drawingml/2006/main" xmlns:r="http://schemas.openxmlformats.org/officeDocument/2006/relationships" xmlns:p="http://schemas.openxmlformats.org/presentationml/2006/main">
+  <p:cSld>
+    <p:spTree>
+      <p:nvGrpSpPr>
+        <p:cNvPr id="1" name=""/>
+        <p:cNvGrpSpPr/>
+        <p:nvPr/>
+      </p:nvGrpSpPr>
+      <p:grpSpPr>
+        <a:xfrm>
+          <a:off x="0" y="0"/>
+          <a:ext cx="0" cy="0"/>
+          <a:chOff x="0" y="0"/>
+          <a:chExt cx="0" cy="0"/>
+        </a:xfrm>
+      </p:grpSpPr>
+      <p:sp>
+        <p:nvSpPr>
+          <p:cNvPr id="2" name="Slide Image Placeholder 1"/>
+          <p:cNvSpPr>
+            <a:spLocks noGrp="1" noRot="1" noChangeAspect="1"/>
+          </p:cNvSpPr>
+          <p:nvPr>
+            <p:ph type="sldImg"/>
+          </p:nvPr>
+        </p:nvSpPr>
+        <p:spPr/>
+      </p:sp>
+      <p:sp>
+        <p:nvSpPr>
+          <p:cNvPr id="3" name="Notes Placeholder 2"/>
+          <p:cNvSpPr>
+            <a:spLocks noGrp="1"/>
+          </p:cNvSpPr>
+          <p:nvPr>
+            <p:ph type="body" idx="1"/>
+          </p:nvPr>
+        </p:nvSpPr>
+        <p:spPr/>
+        <p:txBody>
+          <a:bodyPr/>
+          <a:lstStyle/>
+          <a:p>
+            <a:r>
+              <a:rPr lang="en-US" dirty="0"/>
+              <a:t>“This slide shows how scalability becomes mechanical.</a:t>
+            </a:r>
+          </a:p>
+          <a:p>
+            <a:r>
+              <a:rPr lang="en-US" dirty="0"/>
+              <a:t>We don’t manually write prompts.</a:t>
+            </a:r>
+          </a:p>
+          <a:p>
+            <a:r>
+              <a:rPr lang="en-US" dirty="0"/>
+              <a:t>We assemble them based on:</a:t>
+            </a:r>
+          </a:p>
+          <a:p>
+            <a:r>
+              <a:rPr lang="en-US" dirty="0"/>
+              <a:t>Feature metadata</a:t>
+            </a:r>
+          </a:p>
+          <a:p>
+            <a:r>
+              <a:rPr lang="en-US" dirty="0"/>
+              <a:t>Category &amp; locale resolution</a:t>
+            </a:r>
+          </a:p>
+          <a:p>
+            <a:r>
+              <a:rPr lang="en-US" dirty="0"/>
+              <a:t>Metric selection</a:t>
+            </a:r>
+          </a:p>
+          <a:p>
+            <a:r>
+              <a:rPr lang="en-US" dirty="0"/>
+              <a:t>RAI injection</a:t>
+            </a:r>
+          </a:p>
+          <a:p>
+            <a:r>
+              <a:rPr lang="en-US" dirty="0"/>
+              <a:t>JSON output enforcement</a:t>
+            </a:r>
+          </a:p>
+          <a:p>
+            <a:r>
+              <a:rPr lang="en-US" dirty="0"/>
+              <a:t>Each template has a fixed structure:</a:t>
+            </a:r>
+          </a:p>
+          <a:p>
+            <a:r>
+              <a:rPr lang="en-US" dirty="0"/>
+              <a:t>Evaluator role</a:t>
+            </a:r>
+          </a:p>
+          <a:p>
+            <a:r>
+              <a:rPr lang="en-US" dirty="0"/>
+              <a:t>Hard fail gates</a:t>
+            </a:r>
+          </a:p>
+          <a:p>
+            <a:r>
+              <a:rPr lang="en-US" dirty="0"/>
+              <a:t>Primary metrics with weights</a:t>
+            </a:r>
+          </a:p>
+          <a:p>
+            <a:r>
+              <a:rPr lang="en-US" dirty="0"/>
+              <a:t>Second-order signals</a:t>
+            </a:r>
+          </a:p>
+          <a:p>
+            <a:r>
+              <a:rPr lang="en-US" dirty="0"/>
+              <a:t>Evaluation protocol</a:t>
+            </a:r>
+          </a:p>
+          <a:p>
+            <a:r>
+              <a:rPr lang="en-US" dirty="0"/>
+              <a:t>Responsible AI checklist</a:t>
+            </a:r>
+          </a:p>
+          <a:p>
+            <a:r>
+              <a:rPr lang="en-US" dirty="0"/>
+              <a:t>Structured output format</a:t>
+            </a:r>
+          </a:p>
+          <a:p>
+            <a:r>
+              <a:rPr lang="en-US" dirty="0"/>
+              <a:t>Hard gates override scoring.</a:t>
+            </a:r>
+          </a:p>
+          <a:p>
+            <a:r>
+              <a:rPr lang="en-US" dirty="0"/>
+              <a:t>If privacy or safety fails,</a:t>
+            </a:r>
+            <a:br>
+              <a:rPr lang="en-US" dirty="0"/>
+            </a:br>
+            <a:r>
+              <a:rPr lang="en-US" dirty="0"/>
+              <a:t>the feature fails — regardless of metric averages.</a:t>
+            </a:r>
+          </a:p>
+          <a:p>
+            <a:r>
+              <a:rPr lang="en-US" dirty="0"/>
+              <a:t>This makes risk enforcement scalable and consistent.”</a:t>
+            </a:r>
+          </a:p>
+          <a:p>
+            <a:endParaRPr lang="en-US" dirty="0"/>
+          </a:p>
+        </p:txBody>
+      </p:sp>
+      <p:sp>
+        <p:nvSpPr>
+          <p:cNvPr id="4" name="Slide Number Placeholder 3"/>
+          <p:cNvSpPr>
+            <a:spLocks noGrp="1"/>
+          </p:cNvSpPr>
+          <p:nvPr>
+            <p:ph type="sldNum" sz="quarter" idx="5"/>
+          </p:nvPr>
+        </p:nvSpPr>
+        <p:spPr/>
+        <p:txBody>
+          <a:bodyPr/>
+          <a:lstStyle/>
+          <a:p>
+            <a:fld id="{BCB5180B-A137-4E2C-858C-649AFC4735B1}" type="slidenum">
+              <a:rPr lang="en-US" smtClean="0"/>
+              <a:t>7</a:t>
+            </a:fld>
+            <a:endParaRPr lang="en-US"/>
+          </a:p>
+        </p:txBody>
+      </p:sp>
+    </p:spTree>
+    <p:extLst>
+      <p:ext uri="{BB962C8B-B14F-4D97-AF65-F5344CB8AC3E}">
+        <p14:creationId xmlns:p14="http://schemas.microsoft.com/office/powerpoint/2010/main" val="3256570029"/>
+      </p:ext>
+    </p:extLst>
+  </p:cSld>
+  <p:clrMapOvr>
+    <a:masterClrMapping/>
+  </p:clrMapOvr>
+</p:notes>
+</file>
+
+<file path=ppt/notesSlides/notesSlide8.xml><?xml version="1.0" encoding="utf-8"?>
+<p:notes xmlns:a="http://schemas.openxmlformats.org/drawingml/2006/main" xmlns:r="http://schemas.openxmlformats.org/officeDocument/2006/relationships" xmlns:p="http://schemas.openxmlformats.org/presentationml/2006/main">
+  <p:cSld>
+    <p:spTree>
+      <p:nvGrpSpPr>
+        <p:cNvPr id="1" name=""/>
+        <p:cNvGrpSpPr/>
+        <p:nvPr/>
+      </p:nvGrpSpPr>
+      <p:grpSpPr>
+        <a:xfrm>
+          <a:off x="0" y="0"/>
+          <a:ext cx="0" cy="0"/>
+          <a:chOff x="0" y="0"/>
+          <a:chExt cx="0" cy="0"/>
+        </a:xfrm>
+      </p:grpSpPr>
+      <p:sp>
+        <p:nvSpPr>
+          <p:cNvPr id="2" name="Slide Image Placeholder 1"/>
+          <p:cNvSpPr>
+            <a:spLocks noGrp="1" noRot="1" noChangeAspect="1"/>
+          </p:cNvSpPr>
+          <p:nvPr>
+            <p:ph type="sldImg"/>
+          </p:nvPr>
+        </p:nvSpPr>
+        <p:spPr/>
+      </p:sp>
+      <p:sp>
+        <p:nvSpPr>
+          <p:cNvPr id="3" name="Notes Placeholder 2"/>
+          <p:cNvSpPr>
+            <a:spLocks noGrp="1"/>
+          </p:cNvSpPr>
+          <p:nvPr>
+            <p:ph type="body" idx="1"/>
+          </p:nvPr>
+        </p:nvSpPr>
+        <p:spPr/>
+        <p:txBody>
+          <a:bodyPr/>
+          <a:lstStyle/>
+          <a:p>
+            <a:r>
+              <a:rPr lang="en-US" dirty="0"/>
+              <a:t>When a feature is new or ambiguous, deterministic rules aren’t enough.</a:t>
+            </a:r>
+          </a:p>
+          <a:p>
+            <a:r>
+              <a:rPr lang="en-US" dirty="0"/>
+              <a:t>Agent mode introduces goal-directed reasoning.</a:t>
+            </a:r>
+          </a:p>
+          <a:p>
+            <a:r>
+              <a:rPr lang="en-US" dirty="0"/>
+              <a:t>The agent can:</a:t>
+            </a:r>
+          </a:p>
+          <a:p>
+            <a:r>
+              <a:rPr lang="en-US" dirty="0"/>
+              <a:t>Look up relevant metrics</a:t>
+            </a:r>
+          </a:p>
+          <a:p>
+            <a:r>
+              <a:rPr lang="en-US" dirty="0"/>
+              <a:t>Suggest additional ones</a:t>
+            </a:r>
+          </a:p>
+          <a:p>
+            <a:r>
+              <a:rPr lang="en-US" dirty="0"/>
+              <a:t>Detect architecture type</a:t>
+            </a:r>
+          </a:p>
+          <a:p>
+            <a:r>
+              <a:rPr lang="en-US" dirty="0"/>
+              <a:t>Retrieve locale regulatory info</a:t>
+            </a:r>
+          </a:p>
+          <a:p>
+            <a:r>
+              <a:rPr lang="en-US" dirty="0"/>
+              <a:t>Validate RAI compliance</a:t>
+            </a:r>
+          </a:p>
+          <a:p>
+            <a:r>
+              <a:rPr lang="en-US" dirty="0"/>
+              <a:t>Construct updated evaluation prompts</a:t>
+            </a:r>
+          </a:p>
+          <a:p>
+            <a:r>
+              <a:rPr lang="en-US" dirty="0"/>
+              <a:t>But importantly:</a:t>
+            </a:r>
+            <a:br>
+              <a:rPr lang="en-US" dirty="0"/>
+            </a:br>
+            <a:r>
+              <a:rPr lang="en-US" dirty="0"/>
+              <a:t>It uses tools.</a:t>
+            </a:r>
+            <a:br>
+              <a:rPr lang="en-US" dirty="0"/>
+            </a:br>
+            <a:r>
+              <a:rPr lang="en-US" dirty="0"/>
+              <a:t>It doesn’t hallucinate structure.</a:t>
+            </a:r>
+          </a:p>
+          <a:p>
+            <a:r>
+              <a:rPr lang="en-US" dirty="0"/>
+              <a:t>This makes it adaptive but still governed.”</a:t>
+            </a:r>
+          </a:p>
+          <a:p>
+            <a:endParaRPr lang="en-US" dirty="0"/>
           </a:p>
           <a:p>
             <a:endParaRPr lang="en-US" dirty="0"/>
@@ -16065,6 +17503,220 @@
     <p:extLst>
       <p:ext uri="{BB962C8B-B14F-4D97-AF65-F5344CB8AC3E}">
         <p14:creationId xmlns:p14="http://schemas.microsoft.com/office/powerpoint/2010/main" val="4057367140"/>
+      </p:ext>
+    </p:extLst>
+  </p:cSld>
+  <p:clrMapOvr>
+    <a:masterClrMapping/>
+  </p:clrMapOvr>
+</p:notes>
+</file>
+
+<file path=ppt/notesSlides/notesSlide9.xml><?xml version="1.0" encoding="utf-8"?>
+<p:notes xmlns:a="http://schemas.openxmlformats.org/drawingml/2006/main" xmlns:r="http://schemas.openxmlformats.org/officeDocument/2006/relationships" xmlns:p="http://schemas.openxmlformats.org/presentationml/2006/main">
+  <p:cSld>
+    <p:spTree>
+      <p:nvGrpSpPr>
+        <p:cNvPr id="1" name=""/>
+        <p:cNvGrpSpPr/>
+        <p:nvPr/>
+      </p:nvGrpSpPr>
+      <p:grpSpPr>
+        <a:xfrm>
+          <a:off x="0" y="0"/>
+          <a:ext cx="0" cy="0"/>
+          <a:chOff x="0" y="0"/>
+          <a:chExt cx="0" cy="0"/>
+        </a:xfrm>
+      </p:grpSpPr>
+      <p:sp>
+        <p:nvSpPr>
+          <p:cNvPr id="2" name="Slide Image Placeholder 1"/>
+          <p:cNvSpPr>
+            <a:spLocks noGrp="1" noRot="1" noChangeAspect="1"/>
+          </p:cNvSpPr>
+          <p:nvPr>
+            <p:ph type="sldImg"/>
+          </p:nvPr>
+        </p:nvSpPr>
+        <p:spPr/>
+      </p:sp>
+      <p:sp>
+        <p:nvSpPr>
+          <p:cNvPr id="3" name="Notes Placeholder 2"/>
+          <p:cNvSpPr>
+            <a:spLocks noGrp="1"/>
+          </p:cNvSpPr>
+          <p:nvPr>
+            <p:ph type="body" idx="1"/>
+          </p:nvPr>
+        </p:nvSpPr>
+        <p:spPr/>
+        <p:txBody>
+          <a:bodyPr/>
+          <a:lstStyle/>
+          <a:p>
+            <a:r>
+              <a:rPr lang="en-US" dirty="0"/>
+              <a:t>This comparison makes the tradeoff very clear.</a:t>
+            </a:r>
+          </a:p>
+          <a:p>
+            <a:r>
+              <a:rPr lang="en-US" dirty="0"/>
+              <a:t>With the </a:t>
+            </a:r>
+            <a:r>
+              <a:rPr lang="en-US" b="1" dirty="0"/>
+              <a:t>agent-generated prompt</a:t>
+            </a:r>
+            <a:r>
+              <a:rPr lang="en-US" dirty="0"/>
+              <a:t>, you get:</a:t>
+            </a:r>
+          </a:p>
+          <a:p>
+            <a:r>
+              <a:rPr lang="en-US" dirty="0"/>
+              <a:t>20+ evaluation metrics</a:t>
+            </a:r>
+          </a:p>
+          <a:p>
+            <a:r>
+              <a:rPr lang="en-US" dirty="0"/>
+              <a:t>Very fine-grained reasoning</a:t>
+            </a:r>
+          </a:p>
+          <a:p>
+            <a:r>
+              <a:rPr lang="en-US" dirty="0"/>
+              <a:t>High transparency</a:t>
+            </a:r>
+          </a:p>
+          <a:p>
+            <a:r>
+              <a:rPr lang="en-US" dirty="0"/>
+              <a:t>But it also comes with higher cognitive load.</a:t>
+            </a:r>
+          </a:p>
+          <a:p>
+            <a:r>
+              <a:rPr lang="en-US" dirty="0"/>
+              <a:t>It’s ideal for research, deep diagnostics, and red-teaming — where you want maximum insight.</a:t>
+            </a:r>
+          </a:p>
+          <a:p>
+            <a:r>
+              <a:rPr lang="en-US" dirty="0"/>
+              <a:t>With the </a:t>
+            </a:r>
+            <a:r>
+              <a:rPr lang="en-US" b="1" dirty="0"/>
+              <a:t>template prompt</a:t>
+            </a:r>
+            <a:r>
+              <a:rPr lang="en-US" dirty="0"/>
+              <a:t>, you get:</a:t>
+            </a:r>
+          </a:p>
+          <a:p>
+            <a:r>
+              <a:rPr lang="en-US" dirty="0"/>
+              <a:t>A focused set of core metrics</a:t>
+            </a:r>
+          </a:p>
+          <a:p>
+            <a:r>
+              <a:rPr lang="en-US" dirty="0"/>
+              <a:t>Stable, repeatable outputs</a:t>
+            </a:r>
+          </a:p>
+          <a:p>
+            <a:r>
+              <a:rPr lang="en-US" dirty="0"/>
+              <a:t>Clear operational logic</a:t>
+            </a:r>
+          </a:p>
+          <a:p>
+            <a:r>
+              <a:rPr lang="en-US" dirty="0"/>
+              <a:t>Strong automation readiness</a:t>
+            </a:r>
+          </a:p>
+          <a:p>
+            <a:r>
+              <a:rPr lang="en-US" dirty="0"/>
+              <a:t>So the right choice depends on the scenario.</a:t>
+            </a:r>
+          </a:p>
+          <a:p>
+            <a:r>
+              <a:rPr lang="en-US" dirty="0"/>
+              <a:t>If you need stability and high volume — use the template.</a:t>
+            </a:r>
+            <a:br>
+              <a:rPr lang="en-US" dirty="0"/>
+            </a:br>
+            <a:r>
+              <a:rPr lang="en-US" dirty="0"/>
+              <a:t>If you need depth and adaptability — use the agent.</a:t>
+            </a:r>
+          </a:p>
+          <a:p>
+            <a:r>
+              <a:rPr lang="en-US" dirty="0"/>
+              <a:t>And in many real-world systems, the best solution is hybrid —</a:t>
+            </a:r>
+            <a:br>
+              <a:rPr lang="en-US" dirty="0"/>
+            </a:br>
+            <a:r>
+              <a:rPr lang="en-US" dirty="0"/>
+              <a:t>let the template handle the bulk automation,</a:t>
+            </a:r>
+            <a:br>
+              <a:rPr lang="en-US" dirty="0"/>
+            </a:br>
+            <a:r>
+              <a:rPr lang="en-US" dirty="0"/>
+              <a:t>and let the agent step in when human judgment or deeper reasoning is required.</a:t>
+            </a:r>
+          </a:p>
+          <a:p>
+            <a:r>
+              <a:rPr lang="en-US" dirty="0"/>
+              <a:t>It’s not either-or. It’s about designing the right balance.</a:t>
+            </a:r>
+          </a:p>
+        </p:txBody>
+      </p:sp>
+      <p:sp>
+        <p:nvSpPr>
+          <p:cNvPr id="4" name="Slide Number Placeholder 3"/>
+          <p:cNvSpPr>
+            <a:spLocks noGrp="1"/>
+          </p:cNvSpPr>
+          <p:nvPr>
+            <p:ph type="sldNum" sz="quarter" idx="5"/>
+          </p:nvPr>
+        </p:nvSpPr>
+        <p:spPr/>
+        <p:txBody>
+          <a:bodyPr/>
+          <a:lstStyle/>
+          <a:p>
+            <a:fld id="{BCB5180B-A137-4E2C-858C-649AFC4735B1}" type="slidenum">
+              <a:rPr lang="en-US" smtClean="0"/>
+              <a:t>9</a:t>
+            </a:fld>
+            <a:endParaRPr lang="en-US"/>
+          </a:p>
+        </p:txBody>
+      </p:sp>
+    </p:spTree>
+    <p:extLst>
+      <p:ext uri="{BB962C8B-B14F-4D97-AF65-F5344CB8AC3E}">
+        <p14:creationId xmlns:p14="http://schemas.microsoft.com/office/powerpoint/2010/main" val="813177234"/>
       </p:ext>
     </p:extLst>
   </p:cSld>
@@ -16253,7 +17905,7 @@
           <a:p>
             <a:fld id="{5BCAD085-E8A6-8845-BD4E-CB4CCA059FC4}" type="datetimeFigureOut">
               <a:rPr lang="en-US" smtClean="0"/>
-              <a:t>1/26/2026</a:t>
+              <a:t>2/24/2026</a:t>
             </a:fld>
             <a:endParaRPr lang="en-US"/>
           </a:p>
@@ -16421,7 +18073,7 @@
           <a:p>
             <a:fld id="{5BCAD085-E8A6-8845-BD4E-CB4CCA059FC4}" type="datetimeFigureOut">
               <a:rPr lang="en-US" smtClean="0"/>
-              <a:t>1/26/2026</a:t>
+              <a:t>2/24/2026</a:t>
             </a:fld>
             <a:endParaRPr lang="en-US"/>
           </a:p>
@@ -16599,7 +18251,7 @@
           <a:p>
             <a:fld id="{5BCAD085-E8A6-8845-BD4E-CB4CCA059FC4}" type="datetimeFigureOut">
               <a:rPr lang="en-US" smtClean="0"/>
-              <a:t>1/26/2026</a:t>
+              <a:t>2/24/2026</a:t>
             </a:fld>
             <a:endParaRPr lang="en-US"/>
           </a:p>
@@ -16767,7 +18419,7 @@
           <a:p>
             <a:fld id="{5BCAD085-E8A6-8845-BD4E-CB4CCA059FC4}" type="datetimeFigureOut">
               <a:rPr lang="en-US" smtClean="0"/>
-              <a:t>1/26/2026</a:t>
+              <a:t>2/24/2026</a:t>
             </a:fld>
             <a:endParaRPr lang="en-US"/>
           </a:p>
@@ -17012,7 +18664,7 @@
           <a:p>
             <a:fld id="{5BCAD085-E8A6-8845-BD4E-CB4CCA059FC4}" type="datetimeFigureOut">
               <a:rPr lang="en-US" smtClean="0"/>
-              <a:t>1/26/2026</a:t>
+              <a:t>2/24/2026</a:t>
             </a:fld>
             <a:endParaRPr lang="en-US"/>
           </a:p>
@@ -17297,7 +18949,7 @@
           <a:p>
             <a:fld id="{5BCAD085-E8A6-8845-BD4E-CB4CCA059FC4}" type="datetimeFigureOut">
               <a:rPr lang="en-US" smtClean="0"/>
-              <a:t>1/26/2026</a:t>
+              <a:t>2/24/2026</a:t>
             </a:fld>
             <a:endParaRPr lang="en-US"/>
           </a:p>
@@ -17716,7 +19368,7 @@
           <a:p>
             <a:fld id="{5BCAD085-E8A6-8845-BD4E-CB4CCA059FC4}" type="datetimeFigureOut">
               <a:rPr lang="en-US" smtClean="0"/>
-              <a:t>1/26/2026</a:t>
+              <a:t>2/24/2026</a:t>
             </a:fld>
             <a:endParaRPr lang="en-US"/>
           </a:p>
@@ -17833,7 +19485,7 @@
           <a:p>
             <a:fld id="{5BCAD085-E8A6-8845-BD4E-CB4CCA059FC4}" type="datetimeFigureOut">
               <a:rPr lang="en-US" smtClean="0"/>
-              <a:t>1/26/2026</a:t>
+              <a:t>2/24/2026</a:t>
             </a:fld>
             <a:endParaRPr lang="en-US"/>
           </a:p>
@@ -17928,7 +19580,7 @@
           <a:p>
             <a:fld id="{5BCAD085-E8A6-8845-BD4E-CB4CCA059FC4}" type="datetimeFigureOut">
               <a:rPr lang="en-US" smtClean="0"/>
-              <a:t>1/26/2026</a:t>
+              <a:t>2/24/2026</a:t>
             </a:fld>
             <a:endParaRPr lang="en-US"/>
           </a:p>
@@ -18203,7 +19855,7 @@
           <a:p>
             <a:fld id="{5BCAD085-E8A6-8845-BD4E-CB4CCA059FC4}" type="datetimeFigureOut">
               <a:rPr lang="en-US" smtClean="0"/>
-              <a:t>1/26/2026</a:t>
+              <a:t>2/24/2026</a:t>
             </a:fld>
             <a:endParaRPr lang="en-US"/>
           </a:p>
@@ -18455,7 +20107,7 @@
           <a:p>
             <a:fld id="{5BCAD085-E8A6-8845-BD4E-CB4CCA059FC4}" type="datetimeFigureOut">
               <a:rPr lang="en-US" smtClean="0"/>
-              <a:t>1/26/2026</a:t>
+              <a:t>2/24/2026</a:t>
             </a:fld>
             <a:endParaRPr lang="en-US"/>
           </a:p>
@@ -18666,7 +20318,7 @@
           <a:p>
             <a:fld id="{5BCAD085-E8A6-8845-BD4E-CB4CCA059FC4}" type="datetimeFigureOut">
               <a:rPr lang="en-US" smtClean="0"/>
-              <a:t>1/26/2026</a:t>
+              <a:t>2/24/2026</a:t>
             </a:fld>
             <a:endParaRPr lang="en-US"/>
           </a:p>
@@ -19124,7 +20776,7 @@
           <p:nvPr/>
         </p:nvPicPr>
         <p:blipFill>
-          <a:blip r:embed="rId2"/>
+          <a:blip r:embed="rId3"/>
           <a:srcRect l="14394" r="15284"/>
           <a:stretch>
             <a:fillRect/>
@@ -19132,7 +20784,7 @@
         </p:blipFill>
         <p:spPr>
           <a:xfrm>
-            <a:off x="1891767" y="10"/>
+            <a:off x="2347826" y="10"/>
             <a:ext cx="7252231" cy="6857990"/>
           </a:xfrm>
           <a:prstGeom prst="rect">
@@ -19338,7 +20990,7 @@
         </p:nvSpPr>
         <p:spPr>
           <a:xfrm>
-            <a:off x="2286" y="1291201"/>
+            <a:off x="-117457" y="1237630"/>
             <a:ext cx="8229600" cy="1143000"/>
           </a:xfrm>
           <a:prstGeom prst="rect">
@@ -19561,7 +21213,7 @@
         </p:xfrm>
         <a:graphic>
           <a:graphicData uri="http://schemas.openxmlformats.org/drawingml/2006/diagram">
-            <dgm:relIds xmlns:dgm="http://schemas.openxmlformats.org/drawingml/2006/diagram" xmlns:r="http://schemas.openxmlformats.org/officeDocument/2006/relationships" r:dm="rId2" r:lo="rId3" r:qs="rId4" r:cs="rId5"/>
+            <dgm:relIds xmlns:dgm="http://schemas.openxmlformats.org/drawingml/2006/diagram" xmlns:r="http://schemas.openxmlformats.org/officeDocument/2006/relationships" r:dm="rId3" r:lo="rId4" r:qs="rId5" r:cs="rId6"/>
           </a:graphicData>
         </a:graphic>
       </p:graphicFrame>
@@ -19580,7 +21232,7 @@
           <p:nvPr/>
         </p:nvPicPr>
         <p:blipFill>
-          <a:blip r:embed="rId7"/>
+          <a:blip r:embed="rId8"/>
           <a:stretch>
             <a:fillRect/>
           </a:stretch>
@@ -23060,13 +24712,13 @@
           <p:nvPr/>
         </p:nvPicPr>
         <p:blipFill>
-          <a:blip r:embed="rId2">
+          <a:blip r:embed="rId3">
             <a:extLst>
               <a:ext uri="{28A0092B-C50C-407E-A947-70E740481C1C}">
                 <a14:useLocalDpi xmlns:a14="http://schemas.microsoft.com/office/drawing/2010/main" val="0"/>
               </a:ext>
               <a:ext uri="{96DAC541-7B7A-43D3-8B79-37D633B846F1}">
-                <asvg:svgBlip xmlns:asvg="http://schemas.microsoft.com/office/drawing/2016/SVG/main" r:embed="rId3"/>
+                <asvg:svgBlip xmlns:asvg="http://schemas.microsoft.com/office/drawing/2016/SVG/main" r:embed="rId4"/>
               </a:ext>
             </a:extLst>
           </a:blip>
@@ -23426,10 +25078,10 @@
           <p:nvPr/>
         </p:nvPicPr>
         <p:blipFill>
-          <a:blip r:embed="rId2">
+          <a:blip r:embed="rId3">
             <a:extLst>
               <a:ext uri="{96DAC541-7B7A-43D3-8B79-37D633B846F1}">
-                <asvg:svgBlip xmlns:asvg="http://schemas.microsoft.com/office/drawing/2016/SVG/main" r:embed="rId3"/>
+                <asvg:svgBlip xmlns:asvg="http://schemas.microsoft.com/office/drawing/2016/SVG/main" r:embed="rId4"/>
               </a:ext>
             </a:extLst>
           </a:blip>
@@ -26666,7 +28318,7 @@
                   <a:schemeClr val="tx2"/>
                 </a:solidFill>
               </a:rPr>
-              <a:t>Deterministic, metadata-driven orchestration enables auditability and cross-feature consistency.</a:t>
+              <a:t>Metadata-driven orchestration enables auditability and cross-feature consistency.</a:t>
             </a:r>
           </a:p>
           <a:p>
@@ -29237,7 +30889,7 @@
           <p:nvPr/>
         </p:nvPicPr>
         <p:blipFill>
-          <a:blip r:embed="rId2">
+          <a:blip r:embed="rId3">
             <a:extLst>
               <a:ext uri="{28A0092B-C50C-407E-A947-70E740481C1C}">
                 <a14:useLocalDpi xmlns:a14="http://schemas.microsoft.com/office/drawing/2010/main" val="0"/>
@@ -31996,13 +33648,13 @@
           <p:nvPr/>
         </p:nvPicPr>
         <p:blipFill>
-          <a:blip r:embed="rId2">
+          <a:blip r:embed="rId3">
             <a:extLst>
               <a:ext uri="{28A0092B-C50C-407E-A947-70E740481C1C}">
                 <a14:useLocalDpi xmlns:a14="http://schemas.microsoft.com/office/drawing/2010/main" val="0"/>
               </a:ext>
               <a:ext uri="{96DAC541-7B7A-43D3-8B79-37D633B846F1}">
-                <asvg:svgBlip xmlns:asvg="http://schemas.microsoft.com/office/drawing/2016/SVG/main" r:embed="rId3"/>
+                <asvg:svgBlip xmlns:asvg="http://schemas.microsoft.com/office/drawing/2016/SVG/main" r:embed="rId4"/>
               </a:ext>
             </a:extLst>
           </a:blip>
@@ -32044,7 +33696,7 @@
         </p:xfrm>
         <a:graphic>
           <a:graphicData uri="http://schemas.openxmlformats.org/drawingml/2006/diagram">
-            <dgm:relIds xmlns:dgm="http://schemas.openxmlformats.org/drawingml/2006/diagram" xmlns:r="http://schemas.openxmlformats.org/officeDocument/2006/relationships" r:dm="rId4" r:lo="rId5" r:qs="rId6" r:cs="rId7"/>
+            <dgm:relIds xmlns:dgm="http://schemas.openxmlformats.org/drawingml/2006/diagram" xmlns:r="http://schemas.openxmlformats.org/officeDocument/2006/relationships" r:dm="rId5" r:lo="rId6" r:qs="rId7" r:cs="rId8"/>
           </a:graphicData>
         </a:graphic>
       </p:graphicFrame>
@@ -32197,7 +33849,7 @@
         </p:xfrm>
         <a:graphic>
           <a:graphicData uri="http://schemas.openxmlformats.org/drawingml/2006/diagram">
-            <dgm:relIds xmlns:dgm="http://schemas.openxmlformats.org/drawingml/2006/diagram" xmlns:r="http://schemas.openxmlformats.org/officeDocument/2006/relationships" r:dm="rId2" r:lo="rId3" r:qs="rId4" r:cs="rId5"/>
+            <dgm:relIds xmlns:dgm="http://schemas.openxmlformats.org/drawingml/2006/diagram" xmlns:r="http://schemas.openxmlformats.org/officeDocument/2006/relationships" r:dm="rId3" r:lo="rId4" r:qs="rId5" r:cs="rId6"/>
           </a:graphicData>
         </a:graphic>
       </p:graphicFrame>
@@ -32891,7 +34543,7 @@
           <p:nvPr/>
         </p:nvPicPr>
         <p:blipFill>
-          <a:blip r:embed="rId7">
+          <a:blip r:embed="rId8">
             <a:extLst>
               <a:ext uri="{28A0092B-C50C-407E-A947-70E740481C1C}">
                 <a14:useLocalDpi xmlns:a14="http://schemas.microsoft.com/office/drawing/2010/main" val="0"/>
@@ -33133,21 +34785,6 @@
             <a:noAutofit/>
           </a:bodyPr>
           <a:lstStyle/>
-          <a:p>
-            <a:pPr>
-              <a:lnSpc>
-                <a:spcPct val="150000"/>
-              </a:lnSpc>
-            </a:pPr>
-            <a:r>
-              <a:rPr lang="en-US" sz="2800" dirty="0">
-                <a:solidFill>
-                  <a:schemeClr val="tx2"/>
-                </a:solidFill>
-              </a:rPr>
-              <a:t>Statelessness</a:t>
-            </a:r>
-          </a:p>
           <a:p>
             <a:pPr>
               <a:lnSpc>
@@ -35734,13 +37371,13 @@
           <p:nvPr/>
         </p:nvPicPr>
         <p:blipFill>
-          <a:blip r:embed="rId2">
+          <a:blip r:embed="rId3">
             <a:extLst>
               <a:ext uri="{28A0092B-C50C-407E-A947-70E740481C1C}">
                 <a14:useLocalDpi xmlns:a14="http://schemas.microsoft.com/office/drawing/2010/main" val="0"/>
               </a:ext>
               <a:ext uri="{96DAC541-7B7A-43D3-8B79-37D633B846F1}">
-                <asvg:svgBlip xmlns:asvg="http://schemas.microsoft.com/office/drawing/2016/SVG/main" r:embed="rId3"/>
+                <asvg:svgBlip xmlns:asvg="http://schemas.microsoft.com/office/drawing/2016/SVG/main" r:embed="rId4"/>
               </a:ext>
             </a:extLst>
           </a:blip>
@@ -37094,13 +38731,13 @@
           <p:nvPr/>
         </p:nvPicPr>
         <p:blipFill>
-          <a:blip r:embed="rId2">
+          <a:blip r:embed="rId3">
             <a:extLst>
               <a:ext uri="{28A0092B-C50C-407E-A947-70E740481C1C}">
                 <a14:useLocalDpi xmlns:a14="http://schemas.microsoft.com/office/drawing/2010/main" val="0"/>
               </a:ext>
               <a:ext uri="{96DAC541-7B7A-43D3-8B79-37D633B846F1}">
-                <asvg:svgBlip xmlns:asvg="http://schemas.microsoft.com/office/drawing/2016/SVG/main" r:embed="rId3"/>
+                <asvg:svgBlip xmlns:asvg="http://schemas.microsoft.com/office/drawing/2016/SVG/main" r:embed="rId4"/>
               </a:ext>
             </a:extLst>
           </a:blip>
@@ -37268,7 +38905,7 @@
           <p:nvPr/>
         </p:nvPicPr>
         <p:blipFill>
-          <a:blip r:embed="rId4">
+          <a:blip r:embed="rId5">
             <a:extLst>
               <a:ext uri="{28A0092B-C50C-407E-A947-70E740481C1C}">
                 <a14:useLocalDpi xmlns:a14="http://schemas.microsoft.com/office/drawing/2010/main" val="0"/>
@@ -38156,7 +39793,7 @@
         </p:xfrm>
         <a:graphic>
           <a:graphicData uri="http://schemas.openxmlformats.org/drawingml/2006/diagram">
-            <dgm:relIds xmlns:dgm="http://schemas.openxmlformats.org/drawingml/2006/diagram" xmlns:r="http://schemas.openxmlformats.org/officeDocument/2006/relationships" r:dm="rId2" r:lo="rId3" r:qs="rId4" r:cs="rId5"/>
+            <dgm:relIds xmlns:dgm="http://schemas.openxmlformats.org/drawingml/2006/diagram" xmlns:r="http://schemas.openxmlformats.org/officeDocument/2006/relationships" r:dm="rId3" r:lo="rId4" r:qs="rId5" r:cs="rId6"/>
           </a:graphicData>
         </a:graphic>
       </p:graphicFrame>
@@ -39779,7 +41416,7 @@
           <p:nvPr/>
         </p:nvPicPr>
         <p:blipFill>
-          <a:blip r:embed="rId7">
+          <a:blip r:embed="rId8">
             <a:extLst>
               <a:ext uri="{28A0092B-C50C-407E-A947-70E740481C1C}">
                 <a14:useLocalDpi xmlns:a14="http://schemas.microsoft.com/office/drawing/2010/main" val="0"/>
@@ -39826,7 +41463,7 @@
           <p:nvPr/>
         </p:nvPicPr>
         <p:blipFill>
-          <a:blip r:embed="rId8">
+          <a:blip r:embed="rId9">
             <a:extLst>
               <a:ext uri="{28A0092B-C50C-407E-A947-70E740481C1C}">
                 <a14:useLocalDpi xmlns:a14="http://schemas.microsoft.com/office/drawing/2010/main" val="0"/>
@@ -42269,7 +43906,7 @@
           <a:p>
             <a:r>
               <a:rPr lang="en-US" sz="1200" dirty="0">
-                <a:hlinkClick r:id="rId2"/>
+                <a:hlinkClick r:id="rId3"/>
               </a:rPr>
               <a:t>Sample Prompt</a:t>
             </a:r>
@@ -42307,7 +43944,7 @@
           <a:p>
             <a:r>
               <a:rPr lang="en-US" sz="1200" dirty="0">
-                <a:hlinkClick r:id="rId3"/>
+                <a:hlinkClick r:id="rId4"/>
               </a:rPr>
               <a:t>Sample Prompt</a:t>
             </a:r>
